--- a/Mapped Curriculum Lessons/Grade 7/Lesson 18 - Random Whole Numbers/Random Whole Numbers - Slides.pptx
+++ b/Mapped Curriculum Lessons/Grade 7/Lesson 18 - Random Whole Numbers/Random Whole Numbers - Slides.pptx
@@ -2,28 +2,28 @@
 <file path=ppt/presentation.xml><?xml version="1.0" encoding="utf-8"?>
 <p:presentation xmlns:p="http://schemas.openxmlformats.org/presentationml/2006/main" embedTrueTypeFonts="1" saveSubsetFonts="0">
   <p:sldMasterIdLst>
-    <p:sldMasterId xmlns:r="http://schemas.openxmlformats.org/officeDocument/2006/relationships" id="2147483648" r:id="R9cdcdc1c6c3b41ee"/>
+    <p:sldMasterId xmlns:r="http://schemas.openxmlformats.org/officeDocument/2006/relationships" id="2147483648" r:id="Rd55cb88e1f014f3f"/>
   </p:sldMasterIdLst>
   <p:notesMasterIdLst>
-    <p:notesMasterId xmlns:r="http://schemas.openxmlformats.org/officeDocument/2006/relationships" r:id="R06d6a539045d460e"/>
+    <p:notesMasterId xmlns:r="http://schemas.openxmlformats.org/officeDocument/2006/relationships" r:id="Rf86d37f5bede499c"/>
   </p:notesMasterIdLst>
   <p:sldIdLst>
-    <p:sldId xmlns:r="http://schemas.openxmlformats.org/officeDocument/2006/relationships" id="256" r:id="R2d73fcd1608742a1"/>
-    <p:sldId xmlns:r="http://schemas.openxmlformats.org/officeDocument/2006/relationships" id="257" r:id="Rbd14e475ca224325"/>
-    <p:sldId xmlns:r="http://schemas.openxmlformats.org/officeDocument/2006/relationships" id="258" r:id="R4ccb70c592aa4775"/>
-    <p:sldId xmlns:r="http://schemas.openxmlformats.org/officeDocument/2006/relationships" id="259" r:id="Rece40041f5cf4250"/>
-    <p:sldId xmlns:r="http://schemas.openxmlformats.org/officeDocument/2006/relationships" id="260" r:id="Rf7c89b6902524319"/>
-    <p:sldId xmlns:r="http://schemas.openxmlformats.org/officeDocument/2006/relationships" id="261" r:id="Ra020caae78124bac"/>
-    <p:sldId xmlns:r="http://schemas.openxmlformats.org/officeDocument/2006/relationships" id="262" r:id="R21c32baa8e7747f1"/>
-    <p:sldId xmlns:r="http://schemas.openxmlformats.org/officeDocument/2006/relationships" id="263" r:id="R22bb60ef6c954a22"/>
-    <p:sldId xmlns:r="http://schemas.openxmlformats.org/officeDocument/2006/relationships" id="264" r:id="R89afcc9cb43c4193"/>
+    <p:sldId xmlns:r="http://schemas.openxmlformats.org/officeDocument/2006/relationships" id="256" r:id="R86bbc732f6d14819"/>
+    <p:sldId xmlns:r="http://schemas.openxmlformats.org/officeDocument/2006/relationships" id="257" r:id="Re13bfee6b5d54fff"/>
+    <p:sldId xmlns:r="http://schemas.openxmlformats.org/officeDocument/2006/relationships" id="258" r:id="R475eb64021d943c3"/>
+    <p:sldId xmlns:r="http://schemas.openxmlformats.org/officeDocument/2006/relationships" id="259" r:id="R4d39489c98f54c71"/>
+    <p:sldId xmlns:r="http://schemas.openxmlformats.org/officeDocument/2006/relationships" id="260" r:id="Ra777198ed3954b96"/>
+    <p:sldId xmlns:r="http://schemas.openxmlformats.org/officeDocument/2006/relationships" id="261" r:id="R0ef43f48f50047a5"/>
+    <p:sldId xmlns:r="http://schemas.openxmlformats.org/officeDocument/2006/relationships" id="262" r:id="Rc993dc262d41421c"/>
+    <p:sldId xmlns:r="http://schemas.openxmlformats.org/officeDocument/2006/relationships" id="263" r:id="R1e8f64a1f04e4253"/>
+    <p:sldId xmlns:r="http://schemas.openxmlformats.org/officeDocument/2006/relationships" id="264" r:id="Ra5eebca874fd4269"/>
   </p:sldIdLst>
   <p:sldSz cx="12192000" cy="6858000"/>
   <p:notesSz cx="6858000" cy="9144000"/>
   <p:embeddedFontLst>
     <p:embeddedFont>
       <p:font typeface="JetBrains Mono"/>
-      <p:regular xmlns:r="http://schemas.openxmlformats.org/officeDocument/2006/relationships" r:id="Rd476e44229254a41"/>
+      <p:regular xmlns:r="http://schemas.openxmlformats.org/officeDocument/2006/relationships" r:id="R0d4dd3434d89474f"/>
     </p:embeddedFont>
   </p:embeddedFontLst>
 </p:presentation>
@@ -1071,7 +1071,7 @@
           <p:nvPr/>
         </p:nvPicPr>
         <p:blipFill rotWithShape="1">
-          <a:blip xmlns:r="http://schemas.openxmlformats.org/officeDocument/2006/relationships" xmlns:a="http://schemas.openxmlformats.org/drawingml/2006/main" r:embed="R8e864822c2644f3d"/>
+          <a:blip xmlns:r="http://schemas.openxmlformats.org/officeDocument/2006/relationships" xmlns:a="http://schemas.openxmlformats.org/drawingml/2006/main" r:embed="R3990f481a1bf4dec"/>
           <a:stretch xmlns:a="http://schemas.openxmlformats.org/drawingml/2006/main"/>
         </p:blipFill>
         <p:spPr>
@@ -1451,7 +1451,7 @@
           <p:nvPr/>
         </p:nvPicPr>
         <p:blipFill rotWithShape="1">
-          <a:blip xmlns:r="http://schemas.openxmlformats.org/officeDocument/2006/relationships" xmlns:a="http://schemas.openxmlformats.org/drawingml/2006/main" r:embed="R8b8e9d7cadcb4756">
+          <a:blip xmlns:r="http://schemas.openxmlformats.org/officeDocument/2006/relationships" xmlns:a="http://schemas.openxmlformats.org/drawingml/2006/main" r:embed="R71d11680bfe34b12">
             <a:alphaModFix amt="28000"/>
           </a:blip>
           <a:stretch xmlns:a="http://schemas.openxmlformats.org/drawingml/2006/main"/>
@@ -1664,7 +1664,7 @@
           <p:nvPr/>
         </p:nvPicPr>
         <p:blipFill rotWithShape="1">
-          <a:blip xmlns:r="http://schemas.openxmlformats.org/officeDocument/2006/relationships" xmlns:a="http://schemas.openxmlformats.org/drawingml/2006/main" r:embed="Rbda2aa908e9e4ba7">
+          <a:blip xmlns:r="http://schemas.openxmlformats.org/officeDocument/2006/relationships" xmlns:a="http://schemas.openxmlformats.org/drawingml/2006/main" r:embed="R99314ccbfe7c4569">
             <a:alphaModFix amt="28000"/>
           </a:blip>
           <a:stretch xmlns:a="http://schemas.openxmlformats.org/drawingml/2006/main"/>
@@ -1899,7 +1899,7 @@
           <p:nvPr/>
         </p:nvPicPr>
         <p:blipFill rotWithShape="1">
-          <a:blip xmlns:r="http://schemas.openxmlformats.org/officeDocument/2006/relationships" xmlns:a="http://schemas.openxmlformats.org/drawingml/2006/main" r:embed="Re685fd9b5e8548aa">
+          <a:blip xmlns:r="http://schemas.openxmlformats.org/officeDocument/2006/relationships" xmlns:a="http://schemas.openxmlformats.org/drawingml/2006/main" r:embed="R60270899c96e40ad">
             <a:alphaModFix amt="28000"/>
           </a:blip>
           <a:stretch xmlns:a="http://schemas.openxmlformats.org/drawingml/2006/main"/>
@@ -2176,7 +2176,7 @@
           <p:nvPr/>
         </p:nvPicPr>
         <p:blipFill rotWithShape="1">
-          <a:blip xmlns:r="http://schemas.openxmlformats.org/officeDocument/2006/relationships" xmlns:a="http://schemas.openxmlformats.org/drawingml/2006/main" r:embed="R227b60d61e30479c">
+          <a:blip xmlns:r="http://schemas.openxmlformats.org/officeDocument/2006/relationships" xmlns:a="http://schemas.openxmlformats.org/drawingml/2006/main" r:embed="R57786d3f903d4027">
             <a:alphaModFix amt="28000"/>
           </a:blip>
           <a:stretch xmlns:a="http://schemas.openxmlformats.org/drawingml/2006/main"/>
@@ -2451,7 +2451,7 @@
           <p:nvPr/>
         </p:nvPicPr>
         <p:blipFill rotWithShape="1">
-          <a:blip xmlns:r="http://schemas.openxmlformats.org/officeDocument/2006/relationships" xmlns:a="http://schemas.openxmlformats.org/drawingml/2006/main" r:embed="Ra37f87a468e84af4">
+          <a:blip xmlns:r="http://schemas.openxmlformats.org/officeDocument/2006/relationships" xmlns:a="http://schemas.openxmlformats.org/drawingml/2006/main" r:embed="R6d99766276de4aaa">
             <a:alphaModFix amt="28000"/>
           </a:blip>
           <a:stretch xmlns:a="http://schemas.openxmlformats.org/drawingml/2006/main"/>
@@ -2875,7 +2875,7 @@
           <p:nvPr/>
         </p:nvPicPr>
         <p:blipFill rotWithShape="1">
-          <a:blip xmlns:r="http://schemas.openxmlformats.org/officeDocument/2006/relationships" xmlns:a="http://schemas.openxmlformats.org/drawingml/2006/main" r:embed="Rb210921f82094f2b">
+          <a:blip xmlns:r="http://schemas.openxmlformats.org/officeDocument/2006/relationships" xmlns:a="http://schemas.openxmlformats.org/drawingml/2006/main" r:embed="R7439680d66054f7a">
             <a:alphaModFix amt="28000"/>
           </a:blip>
           <a:stretch xmlns:a="http://schemas.openxmlformats.org/drawingml/2006/main"/>
@@ -3016,7 +3016,7 @@
           <p:nvPr/>
         </p:nvPicPr>
         <p:blipFill rotWithShape="1">
-          <a:blip xmlns:r="http://schemas.openxmlformats.org/officeDocument/2006/relationships" xmlns:a="http://schemas.openxmlformats.org/drawingml/2006/main" r:embed="Rdbe8053998eb41a1">
+          <a:blip xmlns:r="http://schemas.openxmlformats.org/officeDocument/2006/relationships" xmlns:a="http://schemas.openxmlformats.org/drawingml/2006/main" r:embed="R31661ba1e2b04111">
             <a:alphaModFix amt="28000"/>
           </a:blip>
           <a:stretch xmlns:a="http://schemas.openxmlformats.org/drawingml/2006/main"/>
@@ -3130,7 +3130,7 @@
           <p:nvPr/>
         </p:nvPicPr>
         <p:blipFill rotWithShape="1">
-          <a:blip xmlns:r="http://schemas.openxmlformats.org/officeDocument/2006/relationships" xmlns:a="http://schemas.openxmlformats.org/drawingml/2006/main" r:embed="R7d469cf0077b47f7">
+          <a:blip xmlns:r="http://schemas.openxmlformats.org/officeDocument/2006/relationships" xmlns:a="http://schemas.openxmlformats.org/drawingml/2006/main" r:embed="Rd443d64616c54535">
             <a:alphaModFix amt="28000"/>
           </a:blip>
           <a:stretch xmlns:a="http://schemas.openxmlformats.org/drawingml/2006/main"/>
@@ -3457,7 +3457,7 @@
           <p:nvPr/>
         </p:nvPicPr>
         <p:blipFill rotWithShape="1">
-          <a:blip xmlns:r="http://schemas.openxmlformats.org/officeDocument/2006/relationships" xmlns:a="http://schemas.openxmlformats.org/drawingml/2006/main" r:embed="R0cce37dc8e4f4619">
+          <a:blip xmlns:r="http://schemas.openxmlformats.org/officeDocument/2006/relationships" xmlns:a="http://schemas.openxmlformats.org/drawingml/2006/main" r:embed="R76cdd3334f6444d8">
             <a:alphaModFix amt="28000"/>
           </a:blip>
           <a:stretch xmlns:a="http://schemas.openxmlformats.org/drawingml/2006/main"/>
@@ -3745,7 +3745,7 @@
           <p:nvPr/>
         </p:nvPicPr>
         <p:blipFill rotWithShape="1">
-          <a:blip xmlns:r="http://schemas.openxmlformats.org/officeDocument/2006/relationships" xmlns:a="http://schemas.openxmlformats.org/drawingml/2006/main" r:embed="Rba98dec5543d4432">
+          <a:blip xmlns:r="http://schemas.openxmlformats.org/officeDocument/2006/relationships" xmlns:a="http://schemas.openxmlformats.org/drawingml/2006/main" r:embed="R6d79ceebc95c47f9">
             <a:alphaModFix amt="28000"/>
           </a:blip>
           <a:stretch xmlns:a="http://schemas.openxmlformats.org/drawingml/2006/main"/>
@@ -3982,17 +3982,17 @@
   </p:cSld>
   <p:clrMap bg1="lt1" tx1="dk1" bg2="lt2" tx2="dk2" accent1="accent1" accent2="accent2" accent3="accent3" accent4="accent4" accent5="accent5" accent6="accent6" hlink="hlink" folHlink="folHlink"/>
   <p:sldLayoutIdLst>
-    <p:sldLayoutId xmlns:r="http://schemas.openxmlformats.org/officeDocument/2006/relationships" id="2147483649" r:id="R5938e2e77fd74ac1"/>
-    <p:sldLayoutId xmlns:r="http://schemas.openxmlformats.org/officeDocument/2006/relationships" id="2147483650" r:id="R0c15453f7c6f480f"/>
-    <p:sldLayoutId xmlns:r="http://schemas.openxmlformats.org/officeDocument/2006/relationships" id="2147483651" r:id="R9b325ee54a0f4c46"/>
-    <p:sldLayoutId xmlns:r="http://schemas.openxmlformats.org/officeDocument/2006/relationships" id="2147483652" r:id="R22a26e840c614148"/>
-    <p:sldLayoutId xmlns:r="http://schemas.openxmlformats.org/officeDocument/2006/relationships" id="2147483653" r:id="Rd336c5ff1b8e4407"/>
-    <p:sldLayoutId xmlns:r="http://schemas.openxmlformats.org/officeDocument/2006/relationships" id="2147483654" r:id="R1f1ae55b77654d5b"/>
-    <p:sldLayoutId xmlns:r="http://schemas.openxmlformats.org/officeDocument/2006/relationships" id="2147483655" r:id="Rd1bd133dae7f473f"/>
-    <p:sldLayoutId xmlns:r="http://schemas.openxmlformats.org/officeDocument/2006/relationships" id="2147483656" r:id="R404b53af29a248c4"/>
-    <p:sldLayoutId xmlns:r="http://schemas.openxmlformats.org/officeDocument/2006/relationships" id="2147483657" r:id="R9700fa513c6e4644"/>
-    <p:sldLayoutId xmlns:r="http://schemas.openxmlformats.org/officeDocument/2006/relationships" id="2147483658" r:id="R356a37973b024973"/>
-    <p:sldLayoutId xmlns:r="http://schemas.openxmlformats.org/officeDocument/2006/relationships" id="2147483659" r:id="Re1d9d6a87d5a4cdf"/>
+    <p:sldLayoutId xmlns:r="http://schemas.openxmlformats.org/officeDocument/2006/relationships" id="2147483649" r:id="R58f10d3c4b494bb7"/>
+    <p:sldLayoutId xmlns:r="http://schemas.openxmlformats.org/officeDocument/2006/relationships" id="2147483650" r:id="Rd4241ef1153b441a"/>
+    <p:sldLayoutId xmlns:r="http://schemas.openxmlformats.org/officeDocument/2006/relationships" id="2147483651" r:id="R2da3d573da11450e"/>
+    <p:sldLayoutId xmlns:r="http://schemas.openxmlformats.org/officeDocument/2006/relationships" id="2147483652" r:id="Rf3f5a99a3aab4f6c"/>
+    <p:sldLayoutId xmlns:r="http://schemas.openxmlformats.org/officeDocument/2006/relationships" id="2147483653" r:id="Rd6cdd6e03c7c45a5"/>
+    <p:sldLayoutId xmlns:r="http://schemas.openxmlformats.org/officeDocument/2006/relationships" id="2147483654" r:id="R6d1d54e69a5a4527"/>
+    <p:sldLayoutId xmlns:r="http://schemas.openxmlformats.org/officeDocument/2006/relationships" id="2147483655" r:id="R36fb9c2e68f04f7e"/>
+    <p:sldLayoutId xmlns:r="http://schemas.openxmlformats.org/officeDocument/2006/relationships" id="2147483656" r:id="R82f9dbe31bc84b9b"/>
+    <p:sldLayoutId xmlns:r="http://schemas.openxmlformats.org/officeDocument/2006/relationships" id="2147483657" r:id="R72a998e37d1e4b0b"/>
+    <p:sldLayoutId xmlns:r="http://schemas.openxmlformats.org/officeDocument/2006/relationships" id="2147483658" r:id="Red238d902bfe4f68"/>
+    <p:sldLayoutId xmlns:r="http://schemas.openxmlformats.org/officeDocument/2006/relationships" id="2147483659" r:id="Rea0dfdf54b7b4020"/>
   </p:sldLayoutIdLst>
   <p:hf hdr="0" ftr="0" dt="0"/>
   <p:txStyles>

--- a/Mapped Curriculum Lessons/Grade 7/Lesson 18 - Random Whole Numbers/Random Whole Numbers - Slides.pptx
+++ b/Mapped Curriculum Lessons/Grade 7/Lesson 18 - Random Whole Numbers/Random Whole Numbers - Slides.pptx
@@ -2,28 +2,28 @@
 <file path=ppt/presentation.xml><?xml version="1.0" encoding="utf-8"?>
 <p:presentation xmlns:p="http://schemas.openxmlformats.org/presentationml/2006/main" embedTrueTypeFonts="1" saveSubsetFonts="0">
   <p:sldMasterIdLst>
-    <p:sldMasterId xmlns:r="http://schemas.openxmlformats.org/officeDocument/2006/relationships" id="2147483648" r:id="Rd55cb88e1f014f3f"/>
+    <p:sldMasterId xmlns:r="http://schemas.openxmlformats.org/officeDocument/2006/relationships" id="2147483648" r:id="Rfe8ceedc3e814b8b"/>
   </p:sldMasterIdLst>
   <p:notesMasterIdLst>
-    <p:notesMasterId xmlns:r="http://schemas.openxmlformats.org/officeDocument/2006/relationships" r:id="Rf86d37f5bede499c"/>
+    <p:notesMasterId xmlns:r="http://schemas.openxmlformats.org/officeDocument/2006/relationships" r:id="R73ada9c48ebb497c"/>
   </p:notesMasterIdLst>
   <p:sldIdLst>
-    <p:sldId xmlns:r="http://schemas.openxmlformats.org/officeDocument/2006/relationships" id="256" r:id="R86bbc732f6d14819"/>
-    <p:sldId xmlns:r="http://schemas.openxmlformats.org/officeDocument/2006/relationships" id="257" r:id="Re13bfee6b5d54fff"/>
-    <p:sldId xmlns:r="http://schemas.openxmlformats.org/officeDocument/2006/relationships" id="258" r:id="R475eb64021d943c3"/>
-    <p:sldId xmlns:r="http://schemas.openxmlformats.org/officeDocument/2006/relationships" id="259" r:id="R4d39489c98f54c71"/>
-    <p:sldId xmlns:r="http://schemas.openxmlformats.org/officeDocument/2006/relationships" id="260" r:id="Ra777198ed3954b96"/>
-    <p:sldId xmlns:r="http://schemas.openxmlformats.org/officeDocument/2006/relationships" id="261" r:id="R0ef43f48f50047a5"/>
-    <p:sldId xmlns:r="http://schemas.openxmlformats.org/officeDocument/2006/relationships" id="262" r:id="Rc993dc262d41421c"/>
-    <p:sldId xmlns:r="http://schemas.openxmlformats.org/officeDocument/2006/relationships" id="263" r:id="R1e8f64a1f04e4253"/>
-    <p:sldId xmlns:r="http://schemas.openxmlformats.org/officeDocument/2006/relationships" id="264" r:id="Ra5eebca874fd4269"/>
+    <p:sldId xmlns:r="http://schemas.openxmlformats.org/officeDocument/2006/relationships" id="256" r:id="R21eb473b5fba4d85"/>
+    <p:sldId xmlns:r="http://schemas.openxmlformats.org/officeDocument/2006/relationships" id="257" r:id="R985ec01cd9fd4949"/>
+    <p:sldId xmlns:r="http://schemas.openxmlformats.org/officeDocument/2006/relationships" id="258" r:id="Re6d84a70d1c84ae3"/>
+    <p:sldId xmlns:r="http://schemas.openxmlformats.org/officeDocument/2006/relationships" id="259" r:id="Rd0ba9b07e42a4442"/>
+    <p:sldId xmlns:r="http://schemas.openxmlformats.org/officeDocument/2006/relationships" id="260" r:id="Raa37a808893f463f"/>
+    <p:sldId xmlns:r="http://schemas.openxmlformats.org/officeDocument/2006/relationships" id="261" r:id="Rcf89a0083c5e41f1"/>
+    <p:sldId xmlns:r="http://schemas.openxmlformats.org/officeDocument/2006/relationships" id="262" r:id="Rc754ea6eca0b4216"/>
+    <p:sldId xmlns:r="http://schemas.openxmlformats.org/officeDocument/2006/relationships" id="263" r:id="R532c714ffbbf41e5"/>
+    <p:sldId xmlns:r="http://schemas.openxmlformats.org/officeDocument/2006/relationships" id="264" r:id="R1ad01496ec994165"/>
   </p:sldIdLst>
   <p:sldSz cx="12192000" cy="6858000"/>
   <p:notesSz cx="6858000" cy="9144000"/>
   <p:embeddedFontLst>
     <p:embeddedFont>
       <p:font typeface="JetBrains Mono"/>
-      <p:regular xmlns:r="http://schemas.openxmlformats.org/officeDocument/2006/relationships" r:id="R0d4dd3434d89474f"/>
+      <p:regular xmlns:r="http://schemas.openxmlformats.org/officeDocument/2006/relationships" r:id="R61d827921c9d4f80"/>
     </p:embeddedFont>
   </p:embeddedFontLst>
 </p:presentation>
@@ -1071,7 +1071,7 @@
           <p:nvPr/>
         </p:nvPicPr>
         <p:blipFill rotWithShape="1">
-          <a:blip xmlns:r="http://schemas.openxmlformats.org/officeDocument/2006/relationships" xmlns:a="http://schemas.openxmlformats.org/drawingml/2006/main" r:embed="R3990f481a1bf4dec"/>
+          <a:blip xmlns:r="http://schemas.openxmlformats.org/officeDocument/2006/relationships" xmlns:a="http://schemas.openxmlformats.org/drawingml/2006/main" r:embed="Rc3703b2ddfcc4842"/>
           <a:stretch xmlns:a="http://schemas.openxmlformats.org/drawingml/2006/main"/>
         </p:blipFill>
         <p:spPr>
@@ -1451,7 +1451,7 @@
           <p:nvPr/>
         </p:nvPicPr>
         <p:blipFill rotWithShape="1">
-          <a:blip xmlns:r="http://schemas.openxmlformats.org/officeDocument/2006/relationships" xmlns:a="http://schemas.openxmlformats.org/drawingml/2006/main" r:embed="R71d11680bfe34b12">
+          <a:blip xmlns:r="http://schemas.openxmlformats.org/officeDocument/2006/relationships" xmlns:a="http://schemas.openxmlformats.org/drawingml/2006/main" r:embed="R556119a3f81f48d2">
             <a:alphaModFix amt="28000"/>
           </a:blip>
           <a:stretch xmlns:a="http://schemas.openxmlformats.org/drawingml/2006/main"/>
@@ -1664,7 +1664,7 @@
           <p:nvPr/>
         </p:nvPicPr>
         <p:blipFill rotWithShape="1">
-          <a:blip xmlns:r="http://schemas.openxmlformats.org/officeDocument/2006/relationships" xmlns:a="http://schemas.openxmlformats.org/drawingml/2006/main" r:embed="R99314ccbfe7c4569">
+          <a:blip xmlns:r="http://schemas.openxmlformats.org/officeDocument/2006/relationships" xmlns:a="http://schemas.openxmlformats.org/drawingml/2006/main" r:embed="R340c750ae1ca412c">
             <a:alphaModFix amt="28000"/>
           </a:blip>
           <a:stretch xmlns:a="http://schemas.openxmlformats.org/drawingml/2006/main"/>
@@ -1899,7 +1899,7 @@
           <p:nvPr/>
         </p:nvPicPr>
         <p:blipFill rotWithShape="1">
-          <a:blip xmlns:r="http://schemas.openxmlformats.org/officeDocument/2006/relationships" xmlns:a="http://schemas.openxmlformats.org/drawingml/2006/main" r:embed="R60270899c96e40ad">
+          <a:blip xmlns:r="http://schemas.openxmlformats.org/officeDocument/2006/relationships" xmlns:a="http://schemas.openxmlformats.org/drawingml/2006/main" r:embed="R89db9200920d440b">
             <a:alphaModFix amt="28000"/>
           </a:blip>
           <a:stretch xmlns:a="http://schemas.openxmlformats.org/drawingml/2006/main"/>
@@ -2176,7 +2176,7 @@
           <p:nvPr/>
         </p:nvPicPr>
         <p:blipFill rotWithShape="1">
-          <a:blip xmlns:r="http://schemas.openxmlformats.org/officeDocument/2006/relationships" xmlns:a="http://schemas.openxmlformats.org/drawingml/2006/main" r:embed="R57786d3f903d4027">
+          <a:blip xmlns:r="http://schemas.openxmlformats.org/officeDocument/2006/relationships" xmlns:a="http://schemas.openxmlformats.org/drawingml/2006/main" r:embed="R8ab26b2c04cd4fc9">
             <a:alphaModFix amt="28000"/>
           </a:blip>
           <a:stretch xmlns:a="http://schemas.openxmlformats.org/drawingml/2006/main"/>
@@ -2451,7 +2451,7 @@
           <p:nvPr/>
         </p:nvPicPr>
         <p:blipFill rotWithShape="1">
-          <a:blip xmlns:r="http://schemas.openxmlformats.org/officeDocument/2006/relationships" xmlns:a="http://schemas.openxmlformats.org/drawingml/2006/main" r:embed="R6d99766276de4aaa">
+          <a:blip xmlns:r="http://schemas.openxmlformats.org/officeDocument/2006/relationships" xmlns:a="http://schemas.openxmlformats.org/drawingml/2006/main" r:embed="R32712849c0354efa">
             <a:alphaModFix amt="28000"/>
           </a:blip>
           <a:stretch xmlns:a="http://schemas.openxmlformats.org/drawingml/2006/main"/>
@@ -2875,7 +2875,7 @@
           <p:nvPr/>
         </p:nvPicPr>
         <p:blipFill rotWithShape="1">
-          <a:blip xmlns:r="http://schemas.openxmlformats.org/officeDocument/2006/relationships" xmlns:a="http://schemas.openxmlformats.org/drawingml/2006/main" r:embed="R7439680d66054f7a">
+          <a:blip xmlns:r="http://schemas.openxmlformats.org/officeDocument/2006/relationships" xmlns:a="http://schemas.openxmlformats.org/drawingml/2006/main" r:embed="Rab25743ea09b4890">
             <a:alphaModFix amt="28000"/>
           </a:blip>
           <a:stretch xmlns:a="http://schemas.openxmlformats.org/drawingml/2006/main"/>
@@ -3016,7 +3016,7 @@
           <p:nvPr/>
         </p:nvPicPr>
         <p:blipFill rotWithShape="1">
-          <a:blip xmlns:r="http://schemas.openxmlformats.org/officeDocument/2006/relationships" xmlns:a="http://schemas.openxmlformats.org/drawingml/2006/main" r:embed="R31661ba1e2b04111">
+          <a:blip xmlns:r="http://schemas.openxmlformats.org/officeDocument/2006/relationships" xmlns:a="http://schemas.openxmlformats.org/drawingml/2006/main" r:embed="Rc437bc8237c34b3e">
             <a:alphaModFix amt="28000"/>
           </a:blip>
           <a:stretch xmlns:a="http://schemas.openxmlformats.org/drawingml/2006/main"/>
@@ -3130,7 +3130,7 @@
           <p:nvPr/>
         </p:nvPicPr>
         <p:blipFill rotWithShape="1">
-          <a:blip xmlns:r="http://schemas.openxmlformats.org/officeDocument/2006/relationships" xmlns:a="http://schemas.openxmlformats.org/drawingml/2006/main" r:embed="Rd443d64616c54535">
+          <a:blip xmlns:r="http://schemas.openxmlformats.org/officeDocument/2006/relationships" xmlns:a="http://schemas.openxmlformats.org/drawingml/2006/main" r:embed="R85c28b0c48b34208">
             <a:alphaModFix amt="28000"/>
           </a:blip>
           <a:stretch xmlns:a="http://schemas.openxmlformats.org/drawingml/2006/main"/>
@@ -3457,7 +3457,7 @@
           <p:nvPr/>
         </p:nvPicPr>
         <p:blipFill rotWithShape="1">
-          <a:blip xmlns:r="http://schemas.openxmlformats.org/officeDocument/2006/relationships" xmlns:a="http://schemas.openxmlformats.org/drawingml/2006/main" r:embed="R76cdd3334f6444d8">
+          <a:blip xmlns:r="http://schemas.openxmlformats.org/officeDocument/2006/relationships" xmlns:a="http://schemas.openxmlformats.org/drawingml/2006/main" r:embed="Rb998b1b448ee4808">
             <a:alphaModFix amt="28000"/>
           </a:blip>
           <a:stretch xmlns:a="http://schemas.openxmlformats.org/drawingml/2006/main"/>
@@ -3745,7 +3745,7 @@
           <p:nvPr/>
         </p:nvPicPr>
         <p:blipFill rotWithShape="1">
-          <a:blip xmlns:r="http://schemas.openxmlformats.org/officeDocument/2006/relationships" xmlns:a="http://schemas.openxmlformats.org/drawingml/2006/main" r:embed="R6d79ceebc95c47f9">
+          <a:blip xmlns:r="http://schemas.openxmlformats.org/officeDocument/2006/relationships" xmlns:a="http://schemas.openxmlformats.org/drawingml/2006/main" r:embed="R9ccd7b062dcb44b5">
             <a:alphaModFix amt="28000"/>
           </a:blip>
           <a:stretch xmlns:a="http://schemas.openxmlformats.org/drawingml/2006/main"/>
@@ -3982,17 +3982,17 @@
   </p:cSld>
   <p:clrMap bg1="lt1" tx1="dk1" bg2="lt2" tx2="dk2" accent1="accent1" accent2="accent2" accent3="accent3" accent4="accent4" accent5="accent5" accent6="accent6" hlink="hlink" folHlink="folHlink"/>
   <p:sldLayoutIdLst>
-    <p:sldLayoutId xmlns:r="http://schemas.openxmlformats.org/officeDocument/2006/relationships" id="2147483649" r:id="R58f10d3c4b494bb7"/>
-    <p:sldLayoutId xmlns:r="http://schemas.openxmlformats.org/officeDocument/2006/relationships" id="2147483650" r:id="Rd4241ef1153b441a"/>
-    <p:sldLayoutId xmlns:r="http://schemas.openxmlformats.org/officeDocument/2006/relationships" id="2147483651" r:id="R2da3d573da11450e"/>
-    <p:sldLayoutId xmlns:r="http://schemas.openxmlformats.org/officeDocument/2006/relationships" id="2147483652" r:id="Rf3f5a99a3aab4f6c"/>
-    <p:sldLayoutId xmlns:r="http://schemas.openxmlformats.org/officeDocument/2006/relationships" id="2147483653" r:id="Rd6cdd6e03c7c45a5"/>
-    <p:sldLayoutId xmlns:r="http://schemas.openxmlformats.org/officeDocument/2006/relationships" id="2147483654" r:id="R6d1d54e69a5a4527"/>
-    <p:sldLayoutId xmlns:r="http://schemas.openxmlformats.org/officeDocument/2006/relationships" id="2147483655" r:id="R36fb9c2e68f04f7e"/>
-    <p:sldLayoutId xmlns:r="http://schemas.openxmlformats.org/officeDocument/2006/relationships" id="2147483656" r:id="R82f9dbe31bc84b9b"/>
-    <p:sldLayoutId xmlns:r="http://schemas.openxmlformats.org/officeDocument/2006/relationships" id="2147483657" r:id="R72a998e37d1e4b0b"/>
-    <p:sldLayoutId xmlns:r="http://schemas.openxmlformats.org/officeDocument/2006/relationships" id="2147483658" r:id="Red238d902bfe4f68"/>
-    <p:sldLayoutId xmlns:r="http://schemas.openxmlformats.org/officeDocument/2006/relationships" id="2147483659" r:id="Rea0dfdf54b7b4020"/>
+    <p:sldLayoutId xmlns:r="http://schemas.openxmlformats.org/officeDocument/2006/relationships" id="2147483649" r:id="R752a75cf6a8a44c1"/>
+    <p:sldLayoutId xmlns:r="http://schemas.openxmlformats.org/officeDocument/2006/relationships" id="2147483650" r:id="Rc732755f2c5a478b"/>
+    <p:sldLayoutId xmlns:r="http://schemas.openxmlformats.org/officeDocument/2006/relationships" id="2147483651" r:id="Rb7c282c6ab284cb6"/>
+    <p:sldLayoutId xmlns:r="http://schemas.openxmlformats.org/officeDocument/2006/relationships" id="2147483652" r:id="R5731b963f975458d"/>
+    <p:sldLayoutId xmlns:r="http://schemas.openxmlformats.org/officeDocument/2006/relationships" id="2147483653" r:id="Rebb3cd73e80b4894"/>
+    <p:sldLayoutId xmlns:r="http://schemas.openxmlformats.org/officeDocument/2006/relationships" id="2147483654" r:id="R0d47f8e051304d38"/>
+    <p:sldLayoutId xmlns:r="http://schemas.openxmlformats.org/officeDocument/2006/relationships" id="2147483655" r:id="R1b9996415f9f4c6c"/>
+    <p:sldLayoutId xmlns:r="http://schemas.openxmlformats.org/officeDocument/2006/relationships" id="2147483656" r:id="R1851ee864a2c4144"/>
+    <p:sldLayoutId xmlns:r="http://schemas.openxmlformats.org/officeDocument/2006/relationships" id="2147483657" r:id="Rfbe56ed62b4d4ecb"/>
+    <p:sldLayoutId xmlns:r="http://schemas.openxmlformats.org/officeDocument/2006/relationships" id="2147483658" r:id="Ra2c94bcd7e264641"/>
+    <p:sldLayoutId xmlns:r="http://schemas.openxmlformats.org/officeDocument/2006/relationships" id="2147483659" r:id="R48f95f10e3624f6d"/>
   </p:sldLayoutIdLst>
   <p:hf hdr="0" ftr="0" dt="0"/>
   <p:txStyles>
@@ -7432,7 +7432,51 @@
                 <a:ea typeface="Calibri"/>
                 <a:cs typeface="Calibri"/>
               </a:rPr>
-              <a:t>Create a random practice target. Ask for a minimum and maximum whole number, generate one target inside those inclusive bounds, and display it with a label. Test bounds 4 and 4; the target must be 4.</a:t>
+              <a:t>Ask for a minimum whole number and store it in [minimum]. Ask for a maximum whole number and store it in [maximum]. Use </a:t>
+            </a:r>
+            <a:r>
+              <a:rPr sz="2400" b="0">
+                <a:solidFill>
+                  <a:srgbClr val="1750EB"/>
+                </a:solidFill>
+                <a:latin typeface="JetBrains Mono"/>
+                <a:ea typeface="JetBrains Mono"/>
+                <a:cs typeface="JetBrains Mono"/>
+              </a:rPr>
+              <a:t>randint()</a:t>
+            </a:r>
+            <a:r>
+              <a:rPr sz="2400" b="0">
+                <a:solidFill>
+                  <a:srgbClr val="080808"/>
+                </a:solidFill>
+                <a:latin typeface="Calibri"/>
+                <a:ea typeface="Calibri"/>
+                <a:cs typeface="Calibri"/>
+              </a:rPr>
+              <a:t> to generate a number between [minimum] and [maximum], including both values, and store it in [target]. Test 4 and 4; display </a:t>
+            </a:r>
+            <a:r>
+              <a:rPr sz="2400" b="0">
+                <a:solidFill>
+                  <a:srgbClr val="067D17"/>
+                </a:solidFill>
+                <a:latin typeface="JetBrains Mono"/>
+                <a:ea typeface="JetBrains Mono"/>
+                <a:cs typeface="JetBrains Mono"/>
+              </a:rPr>
+              <a:t>"Practice target: 4"</a:t>
+            </a:r>
+            <a:r>
+              <a:rPr sz="2400" b="0">
+                <a:solidFill>
+                  <a:srgbClr val="080808"/>
+                </a:solidFill>
+                <a:latin typeface="Calibri"/>
+                <a:ea typeface="Calibri"/>
+                <a:cs typeface="Calibri"/>
+              </a:rPr>
+              <a:t>.</a:t>
             </a:r>
           </a:p>
         </p:txBody>

--- a/Mapped Curriculum Lessons/Grade 7/Lesson 18 - Random Whole Numbers/Random Whole Numbers - Slides.pptx
+++ b/Mapped Curriculum Lessons/Grade 7/Lesson 18 - Random Whole Numbers/Random Whole Numbers - Slides.pptx
@@ -2,28 +2,28 @@
 <file path=ppt/presentation.xml><?xml version="1.0" encoding="utf-8"?>
 <p:presentation xmlns:p="http://schemas.openxmlformats.org/presentationml/2006/main" embedTrueTypeFonts="1" saveSubsetFonts="0">
   <p:sldMasterIdLst>
-    <p:sldMasterId xmlns:r="http://schemas.openxmlformats.org/officeDocument/2006/relationships" id="2147483648" r:id="Rfe8ceedc3e814b8b"/>
+    <p:sldMasterId xmlns:r="http://schemas.openxmlformats.org/officeDocument/2006/relationships" id="2147483648" r:id="R70916ff99a314087"/>
   </p:sldMasterIdLst>
   <p:notesMasterIdLst>
-    <p:notesMasterId xmlns:r="http://schemas.openxmlformats.org/officeDocument/2006/relationships" r:id="R73ada9c48ebb497c"/>
+    <p:notesMasterId xmlns:r="http://schemas.openxmlformats.org/officeDocument/2006/relationships" r:id="R1dc44663d74f4c30"/>
   </p:notesMasterIdLst>
   <p:sldIdLst>
-    <p:sldId xmlns:r="http://schemas.openxmlformats.org/officeDocument/2006/relationships" id="256" r:id="R21eb473b5fba4d85"/>
-    <p:sldId xmlns:r="http://schemas.openxmlformats.org/officeDocument/2006/relationships" id="257" r:id="R985ec01cd9fd4949"/>
-    <p:sldId xmlns:r="http://schemas.openxmlformats.org/officeDocument/2006/relationships" id="258" r:id="Re6d84a70d1c84ae3"/>
-    <p:sldId xmlns:r="http://schemas.openxmlformats.org/officeDocument/2006/relationships" id="259" r:id="Rd0ba9b07e42a4442"/>
-    <p:sldId xmlns:r="http://schemas.openxmlformats.org/officeDocument/2006/relationships" id="260" r:id="Raa37a808893f463f"/>
-    <p:sldId xmlns:r="http://schemas.openxmlformats.org/officeDocument/2006/relationships" id="261" r:id="Rcf89a0083c5e41f1"/>
-    <p:sldId xmlns:r="http://schemas.openxmlformats.org/officeDocument/2006/relationships" id="262" r:id="Rc754ea6eca0b4216"/>
-    <p:sldId xmlns:r="http://schemas.openxmlformats.org/officeDocument/2006/relationships" id="263" r:id="R532c714ffbbf41e5"/>
-    <p:sldId xmlns:r="http://schemas.openxmlformats.org/officeDocument/2006/relationships" id="264" r:id="R1ad01496ec994165"/>
+    <p:sldId xmlns:r="http://schemas.openxmlformats.org/officeDocument/2006/relationships" id="256" r:id="R948c2164c0f541ff"/>
+    <p:sldId xmlns:r="http://schemas.openxmlformats.org/officeDocument/2006/relationships" id="257" r:id="R49125b73b9f147c6"/>
+    <p:sldId xmlns:r="http://schemas.openxmlformats.org/officeDocument/2006/relationships" id="258" r:id="R8f556deadb5641df"/>
+    <p:sldId xmlns:r="http://schemas.openxmlformats.org/officeDocument/2006/relationships" id="259" r:id="R7fdf529afac64935"/>
+    <p:sldId xmlns:r="http://schemas.openxmlformats.org/officeDocument/2006/relationships" id="260" r:id="Rfcf4d822be884926"/>
+    <p:sldId xmlns:r="http://schemas.openxmlformats.org/officeDocument/2006/relationships" id="261" r:id="R6a664abc93f24e8e"/>
+    <p:sldId xmlns:r="http://schemas.openxmlformats.org/officeDocument/2006/relationships" id="262" r:id="R4cc2518077784b39"/>
+    <p:sldId xmlns:r="http://schemas.openxmlformats.org/officeDocument/2006/relationships" id="263" r:id="R2487a0f706f54c92"/>
+    <p:sldId xmlns:r="http://schemas.openxmlformats.org/officeDocument/2006/relationships" id="264" r:id="R3402f0ba64b64c9e"/>
   </p:sldIdLst>
   <p:sldSz cx="12192000" cy="6858000"/>
   <p:notesSz cx="6858000" cy="9144000"/>
   <p:embeddedFontLst>
     <p:embeddedFont>
       <p:font typeface="JetBrains Mono"/>
-      <p:regular xmlns:r="http://schemas.openxmlformats.org/officeDocument/2006/relationships" r:id="R61d827921c9d4f80"/>
+      <p:regular xmlns:r="http://schemas.openxmlformats.org/officeDocument/2006/relationships" r:id="R2c41db157868467b"/>
     </p:embeddedFont>
   </p:embeddedFontLst>
 </p:presentation>
@@ -1071,7 +1071,7 @@
           <p:nvPr/>
         </p:nvPicPr>
         <p:blipFill rotWithShape="1">
-          <a:blip xmlns:r="http://schemas.openxmlformats.org/officeDocument/2006/relationships" xmlns:a="http://schemas.openxmlformats.org/drawingml/2006/main" r:embed="Rc3703b2ddfcc4842"/>
+          <a:blip xmlns:r="http://schemas.openxmlformats.org/officeDocument/2006/relationships" xmlns:a="http://schemas.openxmlformats.org/drawingml/2006/main" r:embed="Rdcf2cf339f46488b"/>
           <a:stretch xmlns:a="http://schemas.openxmlformats.org/drawingml/2006/main"/>
         </p:blipFill>
         <p:spPr>
@@ -1451,7 +1451,7 @@
           <p:nvPr/>
         </p:nvPicPr>
         <p:blipFill rotWithShape="1">
-          <a:blip xmlns:r="http://schemas.openxmlformats.org/officeDocument/2006/relationships" xmlns:a="http://schemas.openxmlformats.org/drawingml/2006/main" r:embed="R556119a3f81f48d2">
+          <a:blip xmlns:r="http://schemas.openxmlformats.org/officeDocument/2006/relationships" xmlns:a="http://schemas.openxmlformats.org/drawingml/2006/main" r:embed="Ra9a58412533b4b28">
             <a:alphaModFix amt="28000"/>
           </a:blip>
           <a:stretch xmlns:a="http://schemas.openxmlformats.org/drawingml/2006/main"/>
@@ -1664,7 +1664,7 @@
           <p:nvPr/>
         </p:nvPicPr>
         <p:blipFill rotWithShape="1">
-          <a:blip xmlns:r="http://schemas.openxmlformats.org/officeDocument/2006/relationships" xmlns:a="http://schemas.openxmlformats.org/drawingml/2006/main" r:embed="R340c750ae1ca412c">
+          <a:blip xmlns:r="http://schemas.openxmlformats.org/officeDocument/2006/relationships" xmlns:a="http://schemas.openxmlformats.org/drawingml/2006/main" r:embed="R72ae8e262cbd447a">
             <a:alphaModFix amt="28000"/>
           </a:blip>
           <a:stretch xmlns:a="http://schemas.openxmlformats.org/drawingml/2006/main"/>
@@ -1899,7 +1899,7 @@
           <p:nvPr/>
         </p:nvPicPr>
         <p:blipFill rotWithShape="1">
-          <a:blip xmlns:r="http://schemas.openxmlformats.org/officeDocument/2006/relationships" xmlns:a="http://schemas.openxmlformats.org/drawingml/2006/main" r:embed="R89db9200920d440b">
+          <a:blip xmlns:r="http://schemas.openxmlformats.org/officeDocument/2006/relationships" xmlns:a="http://schemas.openxmlformats.org/drawingml/2006/main" r:embed="R8382b4c84fee470e">
             <a:alphaModFix amt="28000"/>
           </a:blip>
           <a:stretch xmlns:a="http://schemas.openxmlformats.org/drawingml/2006/main"/>
@@ -2176,7 +2176,7 @@
           <p:nvPr/>
         </p:nvPicPr>
         <p:blipFill rotWithShape="1">
-          <a:blip xmlns:r="http://schemas.openxmlformats.org/officeDocument/2006/relationships" xmlns:a="http://schemas.openxmlformats.org/drawingml/2006/main" r:embed="R8ab26b2c04cd4fc9">
+          <a:blip xmlns:r="http://schemas.openxmlformats.org/officeDocument/2006/relationships" xmlns:a="http://schemas.openxmlformats.org/drawingml/2006/main" r:embed="R85550859f8534ac9">
             <a:alphaModFix amt="28000"/>
           </a:blip>
           <a:stretch xmlns:a="http://schemas.openxmlformats.org/drawingml/2006/main"/>
@@ -2451,7 +2451,7 @@
           <p:nvPr/>
         </p:nvPicPr>
         <p:blipFill rotWithShape="1">
-          <a:blip xmlns:r="http://schemas.openxmlformats.org/officeDocument/2006/relationships" xmlns:a="http://schemas.openxmlformats.org/drawingml/2006/main" r:embed="R32712849c0354efa">
+          <a:blip xmlns:r="http://schemas.openxmlformats.org/officeDocument/2006/relationships" xmlns:a="http://schemas.openxmlformats.org/drawingml/2006/main" r:embed="Rae16dcdaccfe40a8">
             <a:alphaModFix amt="28000"/>
           </a:blip>
           <a:stretch xmlns:a="http://schemas.openxmlformats.org/drawingml/2006/main"/>
@@ -2875,7 +2875,7 @@
           <p:nvPr/>
         </p:nvPicPr>
         <p:blipFill rotWithShape="1">
-          <a:blip xmlns:r="http://schemas.openxmlformats.org/officeDocument/2006/relationships" xmlns:a="http://schemas.openxmlformats.org/drawingml/2006/main" r:embed="Rab25743ea09b4890">
+          <a:blip xmlns:r="http://schemas.openxmlformats.org/officeDocument/2006/relationships" xmlns:a="http://schemas.openxmlformats.org/drawingml/2006/main" r:embed="Re3c1ae417da94ddf">
             <a:alphaModFix amt="28000"/>
           </a:blip>
           <a:stretch xmlns:a="http://schemas.openxmlformats.org/drawingml/2006/main"/>
@@ -3016,7 +3016,7 @@
           <p:nvPr/>
         </p:nvPicPr>
         <p:blipFill rotWithShape="1">
-          <a:blip xmlns:r="http://schemas.openxmlformats.org/officeDocument/2006/relationships" xmlns:a="http://schemas.openxmlformats.org/drawingml/2006/main" r:embed="Rc437bc8237c34b3e">
+          <a:blip xmlns:r="http://schemas.openxmlformats.org/officeDocument/2006/relationships" xmlns:a="http://schemas.openxmlformats.org/drawingml/2006/main" r:embed="Rbb5ef5114ec849b0">
             <a:alphaModFix amt="28000"/>
           </a:blip>
           <a:stretch xmlns:a="http://schemas.openxmlformats.org/drawingml/2006/main"/>
@@ -3130,7 +3130,7 @@
           <p:nvPr/>
         </p:nvPicPr>
         <p:blipFill rotWithShape="1">
-          <a:blip xmlns:r="http://schemas.openxmlformats.org/officeDocument/2006/relationships" xmlns:a="http://schemas.openxmlformats.org/drawingml/2006/main" r:embed="R85c28b0c48b34208">
+          <a:blip xmlns:r="http://schemas.openxmlformats.org/officeDocument/2006/relationships" xmlns:a="http://schemas.openxmlformats.org/drawingml/2006/main" r:embed="R247eb354d1d94e95">
             <a:alphaModFix amt="28000"/>
           </a:blip>
           <a:stretch xmlns:a="http://schemas.openxmlformats.org/drawingml/2006/main"/>
@@ -3457,7 +3457,7 @@
           <p:nvPr/>
         </p:nvPicPr>
         <p:blipFill rotWithShape="1">
-          <a:blip xmlns:r="http://schemas.openxmlformats.org/officeDocument/2006/relationships" xmlns:a="http://schemas.openxmlformats.org/drawingml/2006/main" r:embed="Rb998b1b448ee4808">
+          <a:blip xmlns:r="http://schemas.openxmlformats.org/officeDocument/2006/relationships" xmlns:a="http://schemas.openxmlformats.org/drawingml/2006/main" r:embed="R4d8eb658d6de4e16">
             <a:alphaModFix amt="28000"/>
           </a:blip>
           <a:stretch xmlns:a="http://schemas.openxmlformats.org/drawingml/2006/main"/>
@@ -3745,7 +3745,7 @@
           <p:nvPr/>
         </p:nvPicPr>
         <p:blipFill rotWithShape="1">
-          <a:blip xmlns:r="http://schemas.openxmlformats.org/officeDocument/2006/relationships" xmlns:a="http://schemas.openxmlformats.org/drawingml/2006/main" r:embed="R9ccd7b062dcb44b5">
+          <a:blip xmlns:r="http://schemas.openxmlformats.org/officeDocument/2006/relationships" xmlns:a="http://schemas.openxmlformats.org/drawingml/2006/main" r:embed="Rea4ccd6c36d243a9">
             <a:alphaModFix amt="28000"/>
           </a:blip>
           <a:stretch xmlns:a="http://schemas.openxmlformats.org/drawingml/2006/main"/>
@@ -3982,17 +3982,17 @@
   </p:cSld>
   <p:clrMap bg1="lt1" tx1="dk1" bg2="lt2" tx2="dk2" accent1="accent1" accent2="accent2" accent3="accent3" accent4="accent4" accent5="accent5" accent6="accent6" hlink="hlink" folHlink="folHlink"/>
   <p:sldLayoutIdLst>
-    <p:sldLayoutId xmlns:r="http://schemas.openxmlformats.org/officeDocument/2006/relationships" id="2147483649" r:id="R752a75cf6a8a44c1"/>
-    <p:sldLayoutId xmlns:r="http://schemas.openxmlformats.org/officeDocument/2006/relationships" id="2147483650" r:id="Rc732755f2c5a478b"/>
-    <p:sldLayoutId xmlns:r="http://schemas.openxmlformats.org/officeDocument/2006/relationships" id="2147483651" r:id="Rb7c282c6ab284cb6"/>
-    <p:sldLayoutId xmlns:r="http://schemas.openxmlformats.org/officeDocument/2006/relationships" id="2147483652" r:id="R5731b963f975458d"/>
-    <p:sldLayoutId xmlns:r="http://schemas.openxmlformats.org/officeDocument/2006/relationships" id="2147483653" r:id="Rebb3cd73e80b4894"/>
-    <p:sldLayoutId xmlns:r="http://schemas.openxmlformats.org/officeDocument/2006/relationships" id="2147483654" r:id="R0d47f8e051304d38"/>
-    <p:sldLayoutId xmlns:r="http://schemas.openxmlformats.org/officeDocument/2006/relationships" id="2147483655" r:id="R1b9996415f9f4c6c"/>
-    <p:sldLayoutId xmlns:r="http://schemas.openxmlformats.org/officeDocument/2006/relationships" id="2147483656" r:id="R1851ee864a2c4144"/>
-    <p:sldLayoutId xmlns:r="http://schemas.openxmlformats.org/officeDocument/2006/relationships" id="2147483657" r:id="Rfbe56ed62b4d4ecb"/>
-    <p:sldLayoutId xmlns:r="http://schemas.openxmlformats.org/officeDocument/2006/relationships" id="2147483658" r:id="Ra2c94bcd7e264641"/>
-    <p:sldLayoutId xmlns:r="http://schemas.openxmlformats.org/officeDocument/2006/relationships" id="2147483659" r:id="R48f95f10e3624f6d"/>
+    <p:sldLayoutId xmlns:r="http://schemas.openxmlformats.org/officeDocument/2006/relationships" id="2147483649" r:id="R69db884c46334a24"/>
+    <p:sldLayoutId xmlns:r="http://schemas.openxmlformats.org/officeDocument/2006/relationships" id="2147483650" r:id="R5ce73dc7e4fa4847"/>
+    <p:sldLayoutId xmlns:r="http://schemas.openxmlformats.org/officeDocument/2006/relationships" id="2147483651" r:id="R2c6c5ed7c6ce4998"/>
+    <p:sldLayoutId xmlns:r="http://schemas.openxmlformats.org/officeDocument/2006/relationships" id="2147483652" r:id="Re19846043a2e4016"/>
+    <p:sldLayoutId xmlns:r="http://schemas.openxmlformats.org/officeDocument/2006/relationships" id="2147483653" r:id="Rff48e85bc73047c3"/>
+    <p:sldLayoutId xmlns:r="http://schemas.openxmlformats.org/officeDocument/2006/relationships" id="2147483654" r:id="R559a1ad5947d4582"/>
+    <p:sldLayoutId xmlns:r="http://schemas.openxmlformats.org/officeDocument/2006/relationships" id="2147483655" r:id="R91a2e96857e04bd0"/>
+    <p:sldLayoutId xmlns:r="http://schemas.openxmlformats.org/officeDocument/2006/relationships" id="2147483656" r:id="R9f448925cb6a466f"/>
+    <p:sldLayoutId xmlns:r="http://schemas.openxmlformats.org/officeDocument/2006/relationships" id="2147483657" r:id="Re7720ede3ad848be"/>
+    <p:sldLayoutId xmlns:r="http://schemas.openxmlformats.org/officeDocument/2006/relationships" id="2147483658" r:id="R136154eac0644267"/>
+    <p:sldLayoutId xmlns:r="http://schemas.openxmlformats.org/officeDocument/2006/relationships" id="2147483659" r:id="R69cfbbbadc844c3e"/>
   </p:sldLayoutIdLst>
   <p:hf hdr="0" ftr="0" dt="0"/>
   <p:txStyles>
@@ -6490,7 +6490,117 @@
                 <a:ea typeface="Calibri"/>
                 <a:cs typeface="Calibri"/>
               </a:rPr>
-              <a:t>Change the die so it can roll numbers from 1 to 12. Run the program several times; every result should be between 1 and 12.</a:t>
+              <a:t>Change the example into a coin toss. Use </a:t>
+            </a:r>
+            <a:r>
+              <a:rPr sz="2050" b="0">
+                <a:solidFill>
+                  <a:srgbClr val="1750EB"/>
+                </a:solidFill>
+                <a:latin typeface="JetBrains Mono"/>
+                <a:ea typeface="JetBrains Mono"/>
+                <a:cs typeface="JetBrains Mono"/>
+              </a:rPr>
+              <a:t>random.randint()</a:t>
+            </a:r>
+            <a:r>
+              <a:rPr sz="2400" b="0">
+                <a:solidFill>
+                  <a:srgbClr val="080808"/>
+                </a:solidFill>
+                <a:latin typeface="Calibri"/>
+                <a:ea typeface="Calibri"/>
+                <a:cs typeface="Calibri"/>
+              </a:rPr>
+              <a:t> to choose 1 or 2, then use </a:t>
+            </a:r>
+            <a:r>
+              <a:rPr sz="2050" b="0">
+                <a:solidFill>
+                  <a:srgbClr val="1750EB"/>
+                </a:solidFill>
+                <a:latin typeface="JetBrains Mono"/>
+                <a:ea typeface="JetBrains Mono"/>
+                <a:cs typeface="JetBrains Mono"/>
+              </a:rPr>
+              <a:t>if</a:t>
+            </a:r>
+            <a:r>
+              <a:rPr sz="2400" b="0">
+                <a:solidFill>
+                  <a:srgbClr val="080808"/>
+                </a:solidFill>
+                <a:latin typeface="Calibri"/>
+                <a:ea typeface="Calibri"/>
+                <a:cs typeface="Calibri"/>
+              </a:rPr>
+              <a:t> and </a:t>
+            </a:r>
+            <a:r>
+              <a:rPr sz="2050" b="0">
+                <a:solidFill>
+                  <a:srgbClr val="1750EB"/>
+                </a:solidFill>
+                <a:latin typeface="JetBrains Mono"/>
+                <a:ea typeface="JetBrains Mono"/>
+                <a:cs typeface="JetBrains Mono"/>
+              </a:rPr>
+              <a:t>else</a:t>
+            </a:r>
+            <a:r>
+              <a:rPr sz="2400" b="0">
+                <a:solidFill>
+                  <a:srgbClr val="080808"/>
+                </a:solidFill>
+                <a:latin typeface="Calibri"/>
+                <a:ea typeface="Calibri"/>
+                <a:cs typeface="Calibri"/>
+              </a:rPr>
+              <a:t> to display </a:t>
+            </a:r>
+            <a:r>
+              <a:rPr sz="2050" b="0">
+                <a:solidFill>
+                  <a:srgbClr val="067D17"/>
+                </a:solidFill>
+                <a:latin typeface="JetBrains Mono"/>
+                <a:ea typeface="JetBrains Mono"/>
+                <a:cs typeface="JetBrains Mono"/>
+              </a:rPr>
+              <a:t>"Heads"</a:t>
+            </a:r>
+            <a:r>
+              <a:rPr sz="2400" b="0">
+                <a:solidFill>
+                  <a:srgbClr val="080808"/>
+                </a:solidFill>
+                <a:latin typeface="Calibri"/>
+                <a:ea typeface="Calibri"/>
+                <a:cs typeface="Calibri"/>
+              </a:rPr>
+              <a:t> for 1 and </a:t>
+            </a:r>
+            <a:r>
+              <a:rPr sz="2050" b="0">
+                <a:solidFill>
+                  <a:srgbClr val="067D17"/>
+                </a:solidFill>
+                <a:latin typeface="JetBrains Mono"/>
+                <a:ea typeface="JetBrains Mono"/>
+                <a:cs typeface="JetBrains Mono"/>
+              </a:rPr>
+              <a:t>"Tails"</a:t>
+            </a:r>
+            <a:r>
+              <a:rPr sz="2400" b="0">
+                <a:solidFill>
+                  <a:srgbClr val="080808"/>
+                </a:solidFill>
+                <a:latin typeface="Calibri"/>
+                <a:ea typeface="Calibri"/>
+                <a:cs typeface="Calibri"/>
+              </a:rPr>
+              <a:t> for 2. Run the program several times until you have seen both results.</a:t>
             </a:r>
           </a:p>
         </p:txBody>
@@ -6961,7 +7071,123 @@
                 <a:ea typeface="Calibri"/>
                 <a:cs typeface="Calibri"/>
               </a:rPr>
-              <a:t>Generate two six-sided rolls. Display both rolls and their total.</a:t>
+              <a:t>Change the example so it rolls two dice. Use </a:t>
+            </a:r>
+            <a:r>
+              <a:rPr sz="2050" b="0">
+                <a:solidFill>
+                  <a:srgbClr val="1750EB"/>
+                </a:solidFill>
+                <a:latin typeface="JetBrains Mono"/>
+                <a:ea typeface="JetBrains Mono"/>
+                <a:cs typeface="JetBrains Mono"/>
+              </a:rPr>
+              <a:t>random.randint()</a:t>
+            </a:r>
+            <a:r>
+              <a:rPr sz="2400" b="0">
+                <a:solidFill>
+                  <a:srgbClr val="080808"/>
+                </a:solidFill>
+                <a:latin typeface="Calibri"/>
+                <a:ea typeface="Calibri"/>
+                <a:cs typeface="Calibri"/>
+              </a:rPr>
+              <a:t> twice and store the rolls in </a:t>
+            </a:r>
+            <a:r>
+              <a:rPr sz="2050" b="0">
+                <a:solidFill>
+                  <a:srgbClr val="6A1B9A"/>
+                </a:solidFill>
+                <a:highlight>
+                  <a:srgbClr val="ECEAF4"/>
+                </a:highlight>
+                <a:latin typeface="JetBrains Mono"/>
+                <a:ea typeface="JetBrains Mono"/>
+                <a:cs typeface="JetBrains Mono"/>
+              </a:rPr>
+              <a:t> roll_one </a:t>
+            </a:r>
+            <a:r>
+              <a:rPr sz="2400" b="0">
+                <a:solidFill>
+                  <a:srgbClr val="080808"/>
+                </a:solidFill>
+                <a:latin typeface="Calibri"/>
+                <a:ea typeface="Calibri"/>
+                <a:cs typeface="Calibri"/>
+              </a:rPr>
+              <a:t> and </a:t>
+            </a:r>
+            <a:r>
+              <a:rPr sz="2050" b="0">
+                <a:solidFill>
+                  <a:srgbClr val="6A1B9A"/>
+                </a:solidFill>
+                <a:highlight>
+                  <a:srgbClr val="ECEAF4"/>
+                </a:highlight>
+                <a:latin typeface="JetBrains Mono"/>
+                <a:ea typeface="JetBrains Mono"/>
+                <a:cs typeface="JetBrains Mono"/>
+              </a:rPr>
+              <a:t> roll_two </a:t>
+            </a:r>
+            <a:r>
+              <a:rPr sz="2400" b="0">
+                <a:solidFill>
+                  <a:srgbClr val="080808"/>
+                </a:solidFill>
+                <a:latin typeface="Calibri"/>
+                <a:ea typeface="Calibri"/>
+                <a:cs typeface="Calibri"/>
+              </a:rPr>
+              <a:t>, display both after </a:t>
+            </a:r>
+            <a:r>
+              <a:rPr sz="2050" b="0">
+                <a:solidFill>
+                  <a:srgbClr val="067D17"/>
+                </a:solidFill>
+                <a:latin typeface="JetBrains Mono"/>
+                <a:ea typeface="JetBrains Mono"/>
+                <a:cs typeface="JetBrains Mono"/>
+              </a:rPr>
+              <a:t>"Rolls:"</a:t>
+            </a:r>
+            <a:r>
+              <a:rPr sz="2400" b="0">
+                <a:solidFill>
+                  <a:srgbClr val="080808"/>
+                </a:solidFill>
+                <a:latin typeface="Calibri"/>
+                <a:ea typeface="Calibri"/>
+                <a:cs typeface="Calibri"/>
+              </a:rPr>
+              <a:t>, then display their sum after </a:t>
+            </a:r>
+            <a:r>
+              <a:rPr sz="2050" b="0">
+                <a:solidFill>
+                  <a:srgbClr val="067D17"/>
+                </a:solidFill>
+                <a:latin typeface="JetBrains Mono"/>
+                <a:ea typeface="JetBrains Mono"/>
+                <a:cs typeface="JetBrains Mono"/>
+              </a:rPr>
+              <a:t>"Total:"</a:t>
+            </a:r>
+            <a:r>
+              <a:rPr sz="2400" b="0">
+                <a:solidFill>
+                  <a:srgbClr val="080808"/>
+                </a:solidFill>
+                <a:latin typeface="Calibri"/>
+                <a:ea typeface="Calibri"/>
+                <a:cs typeface="Calibri"/>
+              </a:rPr>
+              <a:t>. Run it several times and check each total.</a:t>
             </a:r>
           </a:p>
         </p:txBody>
@@ -7432,10 +7658,10 @@
                 <a:ea typeface="Calibri"/>
                 <a:cs typeface="Calibri"/>
               </a:rPr>
-              <a:t>Ask for a minimum whole number and store it in [minimum]. Ask for a maximum whole number and store it in [maximum]. Use </a:t>
-            </a:r>
-            <a:r>
-              <a:rPr sz="2400" b="0">
+              <a:t>Create a guessing program. Ask for a minimum and a maximum whole number, then use </a:t>
+            </a:r>
+            <a:r>
+              <a:rPr sz="2050" b="0">
                 <a:solidFill>
                   <a:srgbClr val="1750EB"/>
                 </a:solidFill>
@@ -7443,7 +7669,7 @@
                 <a:ea typeface="JetBrains Mono"/>
                 <a:cs typeface="JetBrains Mono"/>
               </a:rPr>
-              <a:t>randint()</a:t>
+              <a:t>random.randint()</a:t>
             </a:r>
             <a:r>
               <a:rPr sz="2400" b="0">
@@ -7454,18 +7680,21 @@
                 <a:ea typeface="Calibri"/>
                 <a:cs typeface="Calibri"/>
               </a:rPr>
-              <a:t> to generate a number between [minimum] and [maximum], including both values, and store it in [target]. Test 4 and 4; display </a:t>
-            </a:r>
-            <a:r>
-              <a:rPr sz="2400" b="0">
-                <a:solidFill>
-                  <a:srgbClr val="067D17"/>
-                </a:solidFill>
+              <a:t> to choose a </a:t>
+            </a:r>
+            <a:r>
+              <a:rPr sz="2050" b="0">
+                <a:solidFill>
+                  <a:srgbClr val="6A1B9A"/>
+                </a:solidFill>
+                <a:highlight>
+                  <a:srgbClr val="ECEAF4"/>
+                </a:highlight>
                 <a:latin typeface="JetBrains Mono"/>
                 <a:ea typeface="JetBrains Mono"/>
                 <a:cs typeface="JetBrains Mono"/>
               </a:rPr>
-              <a:t>"Practice target: 4"</a:t>
+              <a:t> target </a:t>
             </a:r>
             <a:r>
               <a:rPr sz="2400" b="0">
@@ -7476,7 +7705,76 @@
                 <a:ea typeface="Calibri"/>
                 <a:cs typeface="Calibri"/>
               </a:rPr>
-              <a:t>.</a:t>
+              <a:t> between them, including both. Ask the user to guess it. Display </a:t>
+            </a:r>
+            <a:r>
+              <a:rPr sz="2050" b="0">
+                <a:solidFill>
+                  <a:srgbClr val="067D17"/>
+                </a:solidFill>
+                <a:latin typeface="JetBrains Mono"/>
+                <a:ea typeface="JetBrains Mono"/>
+                <a:cs typeface="JetBrains Mono"/>
+              </a:rPr>
+              <a:t>"Correct"</a:t>
+            </a:r>
+            <a:r>
+              <a:rPr sz="2400" b="0">
+                <a:solidFill>
+                  <a:srgbClr val="080808"/>
+                </a:solidFill>
+                <a:latin typeface="Calibri"/>
+                <a:ea typeface="Calibri"/>
+                <a:cs typeface="Calibri"/>
+              </a:rPr>
+              <a:t> or </a:t>
+            </a:r>
+            <a:r>
+              <a:rPr sz="2050" b="0">
+                <a:solidFill>
+                  <a:srgbClr val="067D17"/>
+                </a:solidFill>
+                <a:latin typeface="JetBrains Mono"/>
+                <a:ea typeface="JetBrains Mono"/>
+                <a:cs typeface="JetBrains Mono"/>
+              </a:rPr>
+              <a:t>"The target was"</a:t>
+            </a:r>
+            <a:r>
+              <a:rPr sz="2400" b="0">
+                <a:solidFill>
+                  <a:srgbClr val="080808"/>
+                </a:solidFill>
+                <a:latin typeface="Calibri"/>
+                <a:ea typeface="Calibri"/>
+                <a:cs typeface="Calibri"/>
+              </a:rPr>
+              <a:t> followed by </a:t>
+            </a:r>
+            <a:r>
+              <a:rPr sz="2050" b="0">
+                <a:solidFill>
+                  <a:srgbClr val="6A1B9A"/>
+                </a:solidFill>
+                <a:highlight>
+                  <a:srgbClr val="ECEAF4"/>
+                </a:highlight>
+                <a:latin typeface="JetBrains Mono"/>
+                <a:ea typeface="JetBrains Mono"/>
+                <a:cs typeface="JetBrains Mono"/>
+              </a:rPr>
+              <a:t> target </a:t>
+            </a:r>
+            <a:r>
+              <a:rPr sz="2400" b="0">
+                <a:solidFill>
+                  <a:srgbClr val="080808"/>
+                </a:solidFill>
+                <a:latin typeface="Calibri"/>
+                <a:ea typeface="Calibri"/>
+                <a:cs typeface="Calibri"/>
+              </a:rPr>
+              <a:t>. Test 4 and 4 with a guess of 4.</a:t>
             </a:r>
           </a:p>
         </p:txBody>

--- a/Mapped Curriculum Lessons/Grade 7/Lesson 18 - Random Whole Numbers/Random Whole Numbers - Slides.pptx
+++ b/Mapped Curriculum Lessons/Grade 7/Lesson 18 - Random Whole Numbers/Random Whole Numbers - Slides.pptx
@@ -2,28 +2,28 @@
 <file path=ppt/presentation.xml><?xml version="1.0" encoding="utf-8"?>
 <p:presentation xmlns:p="http://schemas.openxmlformats.org/presentationml/2006/main" embedTrueTypeFonts="1" saveSubsetFonts="0">
   <p:sldMasterIdLst>
-    <p:sldMasterId xmlns:r="http://schemas.openxmlformats.org/officeDocument/2006/relationships" id="2147483648" r:id="R70916ff99a314087"/>
+    <p:sldMasterId xmlns:r="http://schemas.openxmlformats.org/officeDocument/2006/relationships" id="2147483648" r:id="R5be32e89bc3c40cf"/>
   </p:sldMasterIdLst>
   <p:notesMasterIdLst>
-    <p:notesMasterId xmlns:r="http://schemas.openxmlformats.org/officeDocument/2006/relationships" r:id="R1dc44663d74f4c30"/>
+    <p:notesMasterId xmlns:r="http://schemas.openxmlformats.org/officeDocument/2006/relationships" r:id="R4a65a851aeec4f83"/>
   </p:notesMasterIdLst>
   <p:sldIdLst>
-    <p:sldId xmlns:r="http://schemas.openxmlformats.org/officeDocument/2006/relationships" id="256" r:id="R948c2164c0f541ff"/>
-    <p:sldId xmlns:r="http://schemas.openxmlformats.org/officeDocument/2006/relationships" id="257" r:id="R49125b73b9f147c6"/>
-    <p:sldId xmlns:r="http://schemas.openxmlformats.org/officeDocument/2006/relationships" id="258" r:id="R8f556deadb5641df"/>
-    <p:sldId xmlns:r="http://schemas.openxmlformats.org/officeDocument/2006/relationships" id="259" r:id="R7fdf529afac64935"/>
-    <p:sldId xmlns:r="http://schemas.openxmlformats.org/officeDocument/2006/relationships" id="260" r:id="Rfcf4d822be884926"/>
-    <p:sldId xmlns:r="http://schemas.openxmlformats.org/officeDocument/2006/relationships" id="261" r:id="R6a664abc93f24e8e"/>
-    <p:sldId xmlns:r="http://schemas.openxmlformats.org/officeDocument/2006/relationships" id="262" r:id="R4cc2518077784b39"/>
-    <p:sldId xmlns:r="http://schemas.openxmlformats.org/officeDocument/2006/relationships" id="263" r:id="R2487a0f706f54c92"/>
-    <p:sldId xmlns:r="http://schemas.openxmlformats.org/officeDocument/2006/relationships" id="264" r:id="R3402f0ba64b64c9e"/>
+    <p:sldId xmlns:r="http://schemas.openxmlformats.org/officeDocument/2006/relationships" id="256" r:id="R41cacdf1ca5046ac"/>
+    <p:sldId xmlns:r="http://schemas.openxmlformats.org/officeDocument/2006/relationships" id="257" r:id="R06f04f3ef9304221"/>
+    <p:sldId xmlns:r="http://schemas.openxmlformats.org/officeDocument/2006/relationships" id="258" r:id="R58421cc72e254b14"/>
+    <p:sldId xmlns:r="http://schemas.openxmlformats.org/officeDocument/2006/relationships" id="259" r:id="R256e7fc070fc4812"/>
+    <p:sldId xmlns:r="http://schemas.openxmlformats.org/officeDocument/2006/relationships" id="260" r:id="Rd99e3e5fcb41456b"/>
+    <p:sldId xmlns:r="http://schemas.openxmlformats.org/officeDocument/2006/relationships" id="261" r:id="Ra51234bbe8394239"/>
+    <p:sldId xmlns:r="http://schemas.openxmlformats.org/officeDocument/2006/relationships" id="262" r:id="R8441924cc4ab4b9f"/>
+    <p:sldId xmlns:r="http://schemas.openxmlformats.org/officeDocument/2006/relationships" id="263" r:id="Rfa25bb8930514dbb"/>
+    <p:sldId xmlns:r="http://schemas.openxmlformats.org/officeDocument/2006/relationships" id="264" r:id="Rd3dfc9ed57a1451d"/>
   </p:sldIdLst>
   <p:sldSz cx="12192000" cy="6858000"/>
   <p:notesSz cx="6858000" cy="9144000"/>
   <p:embeddedFontLst>
     <p:embeddedFont>
       <p:font typeface="JetBrains Mono"/>
-      <p:regular xmlns:r="http://schemas.openxmlformats.org/officeDocument/2006/relationships" r:id="R2c41db157868467b"/>
+      <p:regular xmlns:r="http://schemas.openxmlformats.org/officeDocument/2006/relationships" r:id="R79f5b4cdfdaf4c9c"/>
     </p:embeddedFont>
   </p:embeddedFontLst>
 </p:presentation>
@@ -1071,7 +1071,7 @@
           <p:nvPr/>
         </p:nvPicPr>
         <p:blipFill rotWithShape="1">
-          <a:blip xmlns:r="http://schemas.openxmlformats.org/officeDocument/2006/relationships" xmlns:a="http://schemas.openxmlformats.org/drawingml/2006/main" r:embed="Rdcf2cf339f46488b"/>
+          <a:blip xmlns:r="http://schemas.openxmlformats.org/officeDocument/2006/relationships" xmlns:a="http://schemas.openxmlformats.org/drawingml/2006/main" r:embed="Raece83c6b4734684"/>
           <a:stretch xmlns:a="http://schemas.openxmlformats.org/drawingml/2006/main"/>
         </p:blipFill>
         <p:spPr>
@@ -1451,7 +1451,7 @@
           <p:nvPr/>
         </p:nvPicPr>
         <p:blipFill rotWithShape="1">
-          <a:blip xmlns:r="http://schemas.openxmlformats.org/officeDocument/2006/relationships" xmlns:a="http://schemas.openxmlformats.org/drawingml/2006/main" r:embed="Ra9a58412533b4b28">
+          <a:blip xmlns:r="http://schemas.openxmlformats.org/officeDocument/2006/relationships" xmlns:a="http://schemas.openxmlformats.org/drawingml/2006/main" r:embed="R19368a534baf4cea">
             <a:alphaModFix amt="28000"/>
           </a:blip>
           <a:stretch xmlns:a="http://schemas.openxmlformats.org/drawingml/2006/main"/>
@@ -1664,7 +1664,7 @@
           <p:nvPr/>
         </p:nvPicPr>
         <p:blipFill rotWithShape="1">
-          <a:blip xmlns:r="http://schemas.openxmlformats.org/officeDocument/2006/relationships" xmlns:a="http://schemas.openxmlformats.org/drawingml/2006/main" r:embed="R72ae8e262cbd447a">
+          <a:blip xmlns:r="http://schemas.openxmlformats.org/officeDocument/2006/relationships" xmlns:a="http://schemas.openxmlformats.org/drawingml/2006/main" r:embed="R89e318ae607f4650">
             <a:alphaModFix amt="28000"/>
           </a:blip>
           <a:stretch xmlns:a="http://schemas.openxmlformats.org/drawingml/2006/main"/>
@@ -1899,7 +1899,7 @@
           <p:nvPr/>
         </p:nvPicPr>
         <p:blipFill rotWithShape="1">
-          <a:blip xmlns:r="http://schemas.openxmlformats.org/officeDocument/2006/relationships" xmlns:a="http://schemas.openxmlformats.org/drawingml/2006/main" r:embed="R8382b4c84fee470e">
+          <a:blip xmlns:r="http://schemas.openxmlformats.org/officeDocument/2006/relationships" xmlns:a="http://schemas.openxmlformats.org/drawingml/2006/main" r:embed="Rec62f78d18314c77">
             <a:alphaModFix amt="28000"/>
           </a:blip>
           <a:stretch xmlns:a="http://schemas.openxmlformats.org/drawingml/2006/main"/>
@@ -2176,7 +2176,7 @@
           <p:nvPr/>
         </p:nvPicPr>
         <p:blipFill rotWithShape="1">
-          <a:blip xmlns:r="http://schemas.openxmlformats.org/officeDocument/2006/relationships" xmlns:a="http://schemas.openxmlformats.org/drawingml/2006/main" r:embed="R85550859f8534ac9">
+          <a:blip xmlns:r="http://schemas.openxmlformats.org/officeDocument/2006/relationships" xmlns:a="http://schemas.openxmlformats.org/drawingml/2006/main" r:embed="R7c6a7a69631c4ca9">
             <a:alphaModFix amt="28000"/>
           </a:blip>
           <a:stretch xmlns:a="http://schemas.openxmlformats.org/drawingml/2006/main"/>
@@ -2451,7 +2451,7 @@
           <p:nvPr/>
         </p:nvPicPr>
         <p:blipFill rotWithShape="1">
-          <a:blip xmlns:r="http://schemas.openxmlformats.org/officeDocument/2006/relationships" xmlns:a="http://schemas.openxmlformats.org/drawingml/2006/main" r:embed="Rae16dcdaccfe40a8">
+          <a:blip xmlns:r="http://schemas.openxmlformats.org/officeDocument/2006/relationships" xmlns:a="http://schemas.openxmlformats.org/drawingml/2006/main" r:embed="R353762e8f7e14766">
             <a:alphaModFix amt="28000"/>
           </a:blip>
           <a:stretch xmlns:a="http://schemas.openxmlformats.org/drawingml/2006/main"/>
@@ -2875,7 +2875,7 @@
           <p:nvPr/>
         </p:nvPicPr>
         <p:blipFill rotWithShape="1">
-          <a:blip xmlns:r="http://schemas.openxmlformats.org/officeDocument/2006/relationships" xmlns:a="http://schemas.openxmlformats.org/drawingml/2006/main" r:embed="Re3c1ae417da94ddf">
+          <a:blip xmlns:r="http://schemas.openxmlformats.org/officeDocument/2006/relationships" xmlns:a="http://schemas.openxmlformats.org/drawingml/2006/main" r:embed="R7ae5efd2d78e419c">
             <a:alphaModFix amt="28000"/>
           </a:blip>
           <a:stretch xmlns:a="http://schemas.openxmlformats.org/drawingml/2006/main"/>
@@ -3016,7 +3016,7 @@
           <p:nvPr/>
         </p:nvPicPr>
         <p:blipFill rotWithShape="1">
-          <a:blip xmlns:r="http://schemas.openxmlformats.org/officeDocument/2006/relationships" xmlns:a="http://schemas.openxmlformats.org/drawingml/2006/main" r:embed="Rbb5ef5114ec849b0">
+          <a:blip xmlns:r="http://schemas.openxmlformats.org/officeDocument/2006/relationships" xmlns:a="http://schemas.openxmlformats.org/drawingml/2006/main" r:embed="R477d9aa8d7224bfd">
             <a:alphaModFix amt="28000"/>
           </a:blip>
           <a:stretch xmlns:a="http://schemas.openxmlformats.org/drawingml/2006/main"/>
@@ -3130,7 +3130,7 @@
           <p:nvPr/>
         </p:nvPicPr>
         <p:blipFill rotWithShape="1">
-          <a:blip xmlns:r="http://schemas.openxmlformats.org/officeDocument/2006/relationships" xmlns:a="http://schemas.openxmlformats.org/drawingml/2006/main" r:embed="R247eb354d1d94e95">
+          <a:blip xmlns:r="http://schemas.openxmlformats.org/officeDocument/2006/relationships" xmlns:a="http://schemas.openxmlformats.org/drawingml/2006/main" r:embed="R2e289c6d6cc34272">
             <a:alphaModFix amt="28000"/>
           </a:blip>
           <a:stretch xmlns:a="http://schemas.openxmlformats.org/drawingml/2006/main"/>
@@ -3457,7 +3457,7 @@
           <p:nvPr/>
         </p:nvPicPr>
         <p:blipFill rotWithShape="1">
-          <a:blip xmlns:r="http://schemas.openxmlformats.org/officeDocument/2006/relationships" xmlns:a="http://schemas.openxmlformats.org/drawingml/2006/main" r:embed="R4d8eb658d6de4e16">
+          <a:blip xmlns:r="http://schemas.openxmlformats.org/officeDocument/2006/relationships" xmlns:a="http://schemas.openxmlformats.org/drawingml/2006/main" r:embed="R7f75f127ff094360">
             <a:alphaModFix amt="28000"/>
           </a:blip>
           <a:stretch xmlns:a="http://schemas.openxmlformats.org/drawingml/2006/main"/>
@@ -3745,7 +3745,7 @@
           <p:nvPr/>
         </p:nvPicPr>
         <p:blipFill rotWithShape="1">
-          <a:blip xmlns:r="http://schemas.openxmlformats.org/officeDocument/2006/relationships" xmlns:a="http://schemas.openxmlformats.org/drawingml/2006/main" r:embed="Rea4ccd6c36d243a9">
+          <a:blip xmlns:r="http://schemas.openxmlformats.org/officeDocument/2006/relationships" xmlns:a="http://schemas.openxmlformats.org/drawingml/2006/main" r:embed="Rb036a3716dd84dc1">
             <a:alphaModFix amt="28000"/>
           </a:blip>
           <a:stretch xmlns:a="http://schemas.openxmlformats.org/drawingml/2006/main"/>
@@ -3982,17 +3982,17 @@
   </p:cSld>
   <p:clrMap bg1="lt1" tx1="dk1" bg2="lt2" tx2="dk2" accent1="accent1" accent2="accent2" accent3="accent3" accent4="accent4" accent5="accent5" accent6="accent6" hlink="hlink" folHlink="folHlink"/>
   <p:sldLayoutIdLst>
-    <p:sldLayoutId xmlns:r="http://schemas.openxmlformats.org/officeDocument/2006/relationships" id="2147483649" r:id="R69db884c46334a24"/>
-    <p:sldLayoutId xmlns:r="http://schemas.openxmlformats.org/officeDocument/2006/relationships" id="2147483650" r:id="R5ce73dc7e4fa4847"/>
-    <p:sldLayoutId xmlns:r="http://schemas.openxmlformats.org/officeDocument/2006/relationships" id="2147483651" r:id="R2c6c5ed7c6ce4998"/>
-    <p:sldLayoutId xmlns:r="http://schemas.openxmlformats.org/officeDocument/2006/relationships" id="2147483652" r:id="Re19846043a2e4016"/>
-    <p:sldLayoutId xmlns:r="http://schemas.openxmlformats.org/officeDocument/2006/relationships" id="2147483653" r:id="Rff48e85bc73047c3"/>
-    <p:sldLayoutId xmlns:r="http://schemas.openxmlformats.org/officeDocument/2006/relationships" id="2147483654" r:id="R559a1ad5947d4582"/>
-    <p:sldLayoutId xmlns:r="http://schemas.openxmlformats.org/officeDocument/2006/relationships" id="2147483655" r:id="R91a2e96857e04bd0"/>
-    <p:sldLayoutId xmlns:r="http://schemas.openxmlformats.org/officeDocument/2006/relationships" id="2147483656" r:id="R9f448925cb6a466f"/>
-    <p:sldLayoutId xmlns:r="http://schemas.openxmlformats.org/officeDocument/2006/relationships" id="2147483657" r:id="Re7720ede3ad848be"/>
-    <p:sldLayoutId xmlns:r="http://schemas.openxmlformats.org/officeDocument/2006/relationships" id="2147483658" r:id="R136154eac0644267"/>
-    <p:sldLayoutId xmlns:r="http://schemas.openxmlformats.org/officeDocument/2006/relationships" id="2147483659" r:id="R69cfbbbadc844c3e"/>
+    <p:sldLayoutId xmlns:r="http://schemas.openxmlformats.org/officeDocument/2006/relationships" id="2147483649" r:id="R7eed3d617a664f34"/>
+    <p:sldLayoutId xmlns:r="http://schemas.openxmlformats.org/officeDocument/2006/relationships" id="2147483650" r:id="R7c271d7ea5a44f14"/>
+    <p:sldLayoutId xmlns:r="http://schemas.openxmlformats.org/officeDocument/2006/relationships" id="2147483651" r:id="Rdbfc1e9f13d84c91"/>
+    <p:sldLayoutId xmlns:r="http://schemas.openxmlformats.org/officeDocument/2006/relationships" id="2147483652" r:id="Rbe89ff3165b247ac"/>
+    <p:sldLayoutId xmlns:r="http://schemas.openxmlformats.org/officeDocument/2006/relationships" id="2147483653" r:id="Re975560af94847f3"/>
+    <p:sldLayoutId xmlns:r="http://schemas.openxmlformats.org/officeDocument/2006/relationships" id="2147483654" r:id="R3afcb1d391234858"/>
+    <p:sldLayoutId xmlns:r="http://schemas.openxmlformats.org/officeDocument/2006/relationships" id="2147483655" r:id="R0a710cd6ee15400e"/>
+    <p:sldLayoutId xmlns:r="http://schemas.openxmlformats.org/officeDocument/2006/relationships" id="2147483656" r:id="R1b18d7f670fe4977"/>
+    <p:sldLayoutId xmlns:r="http://schemas.openxmlformats.org/officeDocument/2006/relationships" id="2147483657" r:id="Rf7a7bf16505a4d0c"/>
+    <p:sldLayoutId xmlns:r="http://schemas.openxmlformats.org/officeDocument/2006/relationships" id="2147483658" r:id="R0247e796058e42f9"/>
+    <p:sldLayoutId xmlns:r="http://schemas.openxmlformats.org/officeDocument/2006/relationships" id="2147483659" r:id="R9d590a8b2ec142c6"/>
   </p:sldLayoutIdLst>
   <p:hf hdr="0" ftr="0" dt="0"/>
   <p:txStyles>
@@ -6517,7 +6517,7 @@
             <a:r>
               <a:rPr sz="2050" b="0">
                 <a:solidFill>
-                  <a:srgbClr val="1750EB"/>
+                  <a:srgbClr val="C45E00"/>
                 </a:solidFill>
                 <a:latin typeface="JetBrains Mono"/>
                 <a:ea typeface="JetBrains Mono"/>
@@ -6539,7 +6539,7 @@
             <a:r>
               <a:rPr sz="2050" b="0">
                 <a:solidFill>
-                  <a:srgbClr val="1750EB"/>
+                  <a:srgbClr val="C45E00"/>
                 </a:solidFill>
                 <a:latin typeface="JetBrains Mono"/>
                 <a:ea typeface="JetBrains Mono"/>

--- a/Mapped Curriculum Lessons/Grade 7/Lesson 18 - Random Whole Numbers/Random Whole Numbers - Slides.pptx
+++ b/Mapped Curriculum Lessons/Grade 7/Lesson 18 - Random Whole Numbers/Random Whole Numbers - Slides.pptx
@@ -2,28 +2,28 @@
 <file path=ppt/presentation.xml><?xml version="1.0" encoding="utf-8"?>
 <p:presentation xmlns:p="http://schemas.openxmlformats.org/presentationml/2006/main" embedTrueTypeFonts="1" saveSubsetFonts="0">
   <p:sldMasterIdLst>
-    <p:sldMasterId xmlns:r="http://schemas.openxmlformats.org/officeDocument/2006/relationships" id="2147483648" r:id="R5be32e89bc3c40cf"/>
+    <p:sldMasterId xmlns:r="http://schemas.openxmlformats.org/officeDocument/2006/relationships" id="2147483648" r:id="R7a431d13e0824bf0"/>
   </p:sldMasterIdLst>
   <p:notesMasterIdLst>
-    <p:notesMasterId xmlns:r="http://schemas.openxmlformats.org/officeDocument/2006/relationships" r:id="R4a65a851aeec4f83"/>
+    <p:notesMasterId xmlns:r="http://schemas.openxmlformats.org/officeDocument/2006/relationships" r:id="R95e99f5d680b4ffb"/>
   </p:notesMasterIdLst>
   <p:sldIdLst>
-    <p:sldId xmlns:r="http://schemas.openxmlformats.org/officeDocument/2006/relationships" id="256" r:id="R41cacdf1ca5046ac"/>
-    <p:sldId xmlns:r="http://schemas.openxmlformats.org/officeDocument/2006/relationships" id="257" r:id="R06f04f3ef9304221"/>
-    <p:sldId xmlns:r="http://schemas.openxmlformats.org/officeDocument/2006/relationships" id="258" r:id="R58421cc72e254b14"/>
-    <p:sldId xmlns:r="http://schemas.openxmlformats.org/officeDocument/2006/relationships" id="259" r:id="R256e7fc070fc4812"/>
-    <p:sldId xmlns:r="http://schemas.openxmlformats.org/officeDocument/2006/relationships" id="260" r:id="Rd99e3e5fcb41456b"/>
-    <p:sldId xmlns:r="http://schemas.openxmlformats.org/officeDocument/2006/relationships" id="261" r:id="Ra51234bbe8394239"/>
-    <p:sldId xmlns:r="http://schemas.openxmlformats.org/officeDocument/2006/relationships" id="262" r:id="R8441924cc4ab4b9f"/>
-    <p:sldId xmlns:r="http://schemas.openxmlformats.org/officeDocument/2006/relationships" id="263" r:id="Rfa25bb8930514dbb"/>
-    <p:sldId xmlns:r="http://schemas.openxmlformats.org/officeDocument/2006/relationships" id="264" r:id="Rd3dfc9ed57a1451d"/>
+    <p:sldId xmlns:r="http://schemas.openxmlformats.org/officeDocument/2006/relationships" id="256" r:id="R3599c91b94d84c8a"/>
+    <p:sldId xmlns:r="http://schemas.openxmlformats.org/officeDocument/2006/relationships" id="257" r:id="Rdcd97afa49f84203"/>
+    <p:sldId xmlns:r="http://schemas.openxmlformats.org/officeDocument/2006/relationships" id="258" r:id="Rf9b05e6fe9204104"/>
+    <p:sldId xmlns:r="http://schemas.openxmlformats.org/officeDocument/2006/relationships" id="259" r:id="R0664a91e1cdc4fbf"/>
+    <p:sldId xmlns:r="http://schemas.openxmlformats.org/officeDocument/2006/relationships" id="260" r:id="Rda84e3b87f644e10"/>
+    <p:sldId xmlns:r="http://schemas.openxmlformats.org/officeDocument/2006/relationships" id="261" r:id="R86bdb044cc6849c6"/>
+    <p:sldId xmlns:r="http://schemas.openxmlformats.org/officeDocument/2006/relationships" id="262" r:id="R1bf81f1e1e384ee3"/>
+    <p:sldId xmlns:r="http://schemas.openxmlformats.org/officeDocument/2006/relationships" id="263" r:id="R11132eee19ac47b7"/>
+    <p:sldId xmlns:r="http://schemas.openxmlformats.org/officeDocument/2006/relationships" id="264" r:id="R7023a097158a4e49"/>
   </p:sldIdLst>
   <p:sldSz cx="12192000" cy="6858000"/>
   <p:notesSz cx="6858000" cy="9144000"/>
   <p:embeddedFontLst>
     <p:embeddedFont>
       <p:font typeface="JetBrains Mono"/>
-      <p:regular xmlns:r="http://schemas.openxmlformats.org/officeDocument/2006/relationships" r:id="R79f5b4cdfdaf4c9c"/>
+      <p:regular xmlns:r="http://schemas.openxmlformats.org/officeDocument/2006/relationships" r:id="R6d37374c5ad24520"/>
     </p:embeddedFont>
   </p:embeddedFontLst>
 </p:presentation>
@@ -1071,7 +1071,7 @@
           <p:nvPr/>
         </p:nvPicPr>
         <p:blipFill rotWithShape="1">
-          <a:blip xmlns:r="http://schemas.openxmlformats.org/officeDocument/2006/relationships" xmlns:a="http://schemas.openxmlformats.org/drawingml/2006/main" r:embed="Raece83c6b4734684"/>
+          <a:blip xmlns:r="http://schemas.openxmlformats.org/officeDocument/2006/relationships" xmlns:a="http://schemas.openxmlformats.org/drawingml/2006/main" r:embed="R17e84439e83e4eb3"/>
           <a:stretch xmlns:a="http://schemas.openxmlformats.org/drawingml/2006/main"/>
         </p:blipFill>
         <p:spPr>
@@ -1451,7 +1451,7 @@
           <p:nvPr/>
         </p:nvPicPr>
         <p:blipFill rotWithShape="1">
-          <a:blip xmlns:r="http://schemas.openxmlformats.org/officeDocument/2006/relationships" xmlns:a="http://schemas.openxmlformats.org/drawingml/2006/main" r:embed="R19368a534baf4cea">
+          <a:blip xmlns:r="http://schemas.openxmlformats.org/officeDocument/2006/relationships" xmlns:a="http://schemas.openxmlformats.org/drawingml/2006/main" r:embed="R30ee789cccf44b35">
             <a:alphaModFix amt="28000"/>
           </a:blip>
           <a:stretch xmlns:a="http://schemas.openxmlformats.org/drawingml/2006/main"/>
@@ -1664,7 +1664,7 @@
           <p:nvPr/>
         </p:nvPicPr>
         <p:blipFill rotWithShape="1">
-          <a:blip xmlns:r="http://schemas.openxmlformats.org/officeDocument/2006/relationships" xmlns:a="http://schemas.openxmlformats.org/drawingml/2006/main" r:embed="R89e318ae607f4650">
+          <a:blip xmlns:r="http://schemas.openxmlformats.org/officeDocument/2006/relationships" xmlns:a="http://schemas.openxmlformats.org/drawingml/2006/main" r:embed="R881fad5a973e43f0">
             <a:alphaModFix amt="28000"/>
           </a:blip>
           <a:stretch xmlns:a="http://schemas.openxmlformats.org/drawingml/2006/main"/>
@@ -1899,7 +1899,7 @@
           <p:nvPr/>
         </p:nvPicPr>
         <p:blipFill rotWithShape="1">
-          <a:blip xmlns:r="http://schemas.openxmlformats.org/officeDocument/2006/relationships" xmlns:a="http://schemas.openxmlformats.org/drawingml/2006/main" r:embed="Rec62f78d18314c77">
+          <a:blip xmlns:r="http://schemas.openxmlformats.org/officeDocument/2006/relationships" xmlns:a="http://schemas.openxmlformats.org/drawingml/2006/main" r:embed="Re4812914b8a84682">
             <a:alphaModFix amt="28000"/>
           </a:blip>
           <a:stretch xmlns:a="http://schemas.openxmlformats.org/drawingml/2006/main"/>
@@ -2176,7 +2176,7 @@
           <p:nvPr/>
         </p:nvPicPr>
         <p:blipFill rotWithShape="1">
-          <a:blip xmlns:r="http://schemas.openxmlformats.org/officeDocument/2006/relationships" xmlns:a="http://schemas.openxmlformats.org/drawingml/2006/main" r:embed="R7c6a7a69631c4ca9">
+          <a:blip xmlns:r="http://schemas.openxmlformats.org/officeDocument/2006/relationships" xmlns:a="http://schemas.openxmlformats.org/drawingml/2006/main" r:embed="R3b25b2896ddc433a">
             <a:alphaModFix amt="28000"/>
           </a:blip>
           <a:stretch xmlns:a="http://schemas.openxmlformats.org/drawingml/2006/main"/>
@@ -2451,7 +2451,7 @@
           <p:nvPr/>
         </p:nvPicPr>
         <p:blipFill rotWithShape="1">
-          <a:blip xmlns:r="http://schemas.openxmlformats.org/officeDocument/2006/relationships" xmlns:a="http://schemas.openxmlformats.org/drawingml/2006/main" r:embed="R353762e8f7e14766">
+          <a:blip xmlns:r="http://schemas.openxmlformats.org/officeDocument/2006/relationships" xmlns:a="http://schemas.openxmlformats.org/drawingml/2006/main" r:embed="R33aa6fe97a26486a">
             <a:alphaModFix amt="28000"/>
           </a:blip>
           <a:stretch xmlns:a="http://schemas.openxmlformats.org/drawingml/2006/main"/>
@@ -2875,7 +2875,7 @@
           <p:nvPr/>
         </p:nvPicPr>
         <p:blipFill rotWithShape="1">
-          <a:blip xmlns:r="http://schemas.openxmlformats.org/officeDocument/2006/relationships" xmlns:a="http://schemas.openxmlformats.org/drawingml/2006/main" r:embed="R7ae5efd2d78e419c">
+          <a:blip xmlns:r="http://schemas.openxmlformats.org/officeDocument/2006/relationships" xmlns:a="http://schemas.openxmlformats.org/drawingml/2006/main" r:embed="R43c4fc77ea2146cf">
             <a:alphaModFix amt="28000"/>
           </a:blip>
           <a:stretch xmlns:a="http://schemas.openxmlformats.org/drawingml/2006/main"/>
@@ -3016,7 +3016,7 @@
           <p:nvPr/>
         </p:nvPicPr>
         <p:blipFill rotWithShape="1">
-          <a:blip xmlns:r="http://schemas.openxmlformats.org/officeDocument/2006/relationships" xmlns:a="http://schemas.openxmlformats.org/drawingml/2006/main" r:embed="R477d9aa8d7224bfd">
+          <a:blip xmlns:r="http://schemas.openxmlformats.org/officeDocument/2006/relationships" xmlns:a="http://schemas.openxmlformats.org/drawingml/2006/main" r:embed="R03ccf5572b544108">
             <a:alphaModFix amt="28000"/>
           </a:blip>
           <a:stretch xmlns:a="http://schemas.openxmlformats.org/drawingml/2006/main"/>
@@ -3130,7 +3130,7 @@
           <p:nvPr/>
         </p:nvPicPr>
         <p:blipFill rotWithShape="1">
-          <a:blip xmlns:r="http://schemas.openxmlformats.org/officeDocument/2006/relationships" xmlns:a="http://schemas.openxmlformats.org/drawingml/2006/main" r:embed="R2e289c6d6cc34272">
+          <a:blip xmlns:r="http://schemas.openxmlformats.org/officeDocument/2006/relationships" xmlns:a="http://schemas.openxmlformats.org/drawingml/2006/main" r:embed="Rd9ec8425ba9a4e5b">
             <a:alphaModFix amt="28000"/>
           </a:blip>
           <a:stretch xmlns:a="http://schemas.openxmlformats.org/drawingml/2006/main"/>
@@ -3457,7 +3457,7 @@
           <p:nvPr/>
         </p:nvPicPr>
         <p:blipFill rotWithShape="1">
-          <a:blip xmlns:r="http://schemas.openxmlformats.org/officeDocument/2006/relationships" xmlns:a="http://schemas.openxmlformats.org/drawingml/2006/main" r:embed="R7f75f127ff094360">
+          <a:blip xmlns:r="http://schemas.openxmlformats.org/officeDocument/2006/relationships" xmlns:a="http://schemas.openxmlformats.org/drawingml/2006/main" r:embed="R0d3216652abc45e8">
             <a:alphaModFix amt="28000"/>
           </a:blip>
           <a:stretch xmlns:a="http://schemas.openxmlformats.org/drawingml/2006/main"/>
@@ -3745,7 +3745,7 @@
           <p:nvPr/>
         </p:nvPicPr>
         <p:blipFill rotWithShape="1">
-          <a:blip xmlns:r="http://schemas.openxmlformats.org/officeDocument/2006/relationships" xmlns:a="http://schemas.openxmlformats.org/drawingml/2006/main" r:embed="Rb036a3716dd84dc1">
+          <a:blip xmlns:r="http://schemas.openxmlformats.org/officeDocument/2006/relationships" xmlns:a="http://schemas.openxmlformats.org/drawingml/2006/main" r:embed="Ra92d2b3170f84a6c">
             <a:alphaModFix amt="28000"/>
           </a:blip>
           <a:stretch xmlns:a="http://schemas.openxmlformats.org/drawingml/2006/main"/>
@@ -3982,17 +3982,17 @@
   </p:cSld>
   <p:clrMap bg1="lt1" tx1="dk1" bg2="lt2" tx2="dk2" accent1="accent1" accent2="accent2" accent3="accent3" accent4="accent4" accent5="accent5" accent6="accent6" hlink="hlink" folHlink="folHlink"/>
   <p:sldLayoutIdLst>
-    <p:sldLayoutId xmlns:r="http://schemas.openxmlformats.org/officeDocument/2006/relationships" id="2147483649" r:id="R7eed3d617a664f34"/>
-    <p:sldLayoutId xmlns:r="http://schemas.openxmlformats.org/officeDocument/2006/relationships" id="2147483650" r:id="R7c271d7ea5a44f14"/>
-    <p:sldLayoutId xmlns:r="http://schemas.openxmlformats.org/officeDocument/2006/relationships" id="2147483651" r:id="Rdbfc1e9f13d84c91"/>
-    <p:sldLayoutId xmlns:r="http://schemas.openxmlformats.org/officeDocument/2006/relationships" id="2147483652" r:id="Rbe89ff3165b247ac"/>
-    <p:sldLayoutId xmlns:r="http://schemas.openxmlformats.org/officeDocument/2006/relationships" id="2147483653" r:id="Re975560af94847f3"/>
-    <p:sldLayoutId xmlns:r="http://schemas.openxmlformats.org/officeDocument/2006/relationships" id="2147483654" r:id="R3afcb1d391234858"/>
-    <p:sldLayoutId xmlns:r="http://schemas.openxmlformats.org/officeDocument/2006/relationships" id="2147483655" r:id="R0a710cd6ee15400e"/>
-    <p:sldLayoutId xmlns:r="http://schemas.openxmlformats.org/officeDocument/2006/relationships" id="2147483656" r:id="R1b18d7f670fe4977"/>
-    <p:sldLayoutId xmlns:r="http://schemas.openxmlformats.org/officeDocument/2006/relationships" id="2147483657" r:id="Rf7a7bf16505a4d0c"/>
-    <p:sldLayoutId xmlns:r="http://schemas.openxmlformats.org/officeDocument/2006/relationships" id="2147483658" r:id="R0247e796058e42f9"/>
-    <p:sldLayoutId xmlns:r="http://schemas.openxmlformats.org/officeDocument/2006/relationships" id="2147483659" r:id="R9d590a8b2ec142c6"/>
+    <p:sldLayoutId xmlns:r="http://schemas.openxmlformats.org/officeDocument/2006/relationships" id="2147483649" r:id="Re0c7ceac8880498f"/>
+    <p:sldLayoutId xmlns:r="http://schemas.openxmlformats.org/officeDocument/2006/relationships" id="2147483650" r:id="R4f68d274a4304672"/>
+    <p:sldLayoutId xmlns:r="http://schemas.openxmlformats.org/officeDocument/2006/relationships" id="2147483651" r:id="R95c50df6738c443f"/>
+    <p:sldLayoutId xmlns:r="http://schemas.openxmlformats.org/officeDocument/2006/relationships" id="2147483652" r:id="Rdfd263a2047545b5"/>
+    <p:sldLayoutId xmlns:r="http://schemas.openxmlformats.org/officeDocument/2006/relationships" id="2147483653" r:id="R00bb3bc68d3d4001"/>
+    <p:sldLayoutId xmlns:r="http://schemas.openxmlformats.org/officeDocument/2006/relationships" id="2147483654" r:id="R96b79f5b51e6466d"/>
+    <p:sldLayoutId xmlns:r="http://schemas.openxmlformats.org/officeDocument/2006/relationships" id="2147483655" r:id="R1d4bfdaacb5d43b1"/>
+    <p:sldLayoutId xmlns:r="http://schemas.openxmlformats.org/officeDocument/2006/relationships" id="2147483656" r:id="R85bac41c381642cd"/>
+    <p:sldLayoutId xmlns:r="http://schemas.openxmlformats.org/officeDocument/2006/relationships" id="2147483657" r:id="Rf7176cf20e5b4f99"/>
+    <p:sldLayoutId xmlns:r="http://schemas.openxmlformats.org/officeDocument/2006/relationships" id="2147483658" r:id="Rc7c274e6a7da4365"/>
+    <p:sldLayoutId xmlns:r="http://schemas.openxmlformats.org/officeDocument/2006/relationships" id="2147483659" r:id="R7d352789593a4852"/>
   </p:sldLayoutIdLst>
   <p:hf hdr="0" ftr="0" dt="0"/>
   <p:txStyles>
@@ -4898,13 +4898,24 @@
             <a:r>
               <a:rPr sz="2400">
                 <a:solidFill>
-                  <a:srgbClr val="080808"/>
+                  <a:srgbClr val="C45E00"/>
                 </a:solidFill>
                 <a:latin typeface="JetBrains Mono"/>
                 <a:ea typeface="JetBrains Mono"/>
                 <a:cs typeface="JetBrains Mono"/>
               </a:rPr>
-              <a:t>import random</a:t>
+              <a:t>import</a:t>
+            </a:r>
+            <a:r>
+              <a:rPr sz="2400">
+                <a:solidFill>
+                  <a:srgbClr val="080808"/>
+                </a:solidFill>
+                <a:latin typeface="JetBrains Mono"/>
+                <a:ea typeface="JetBrains Mono"/>
+                <a:cs typeface="JetBrains Mono"/>
+              </a:rPr>
+              <a:t> random</a:t>
             </a:r>
           </a:p>
           <a:p xmlns:a="http://schemas.openxmlformats.org/drawingml/2006/main">
@@ -5284,13 +5295,24 @@
             <a:r>
               <a:rPr sz="2400">
                 <a:solidFill>
-                  <a:srgbClr val="080808"/>
+                  <a:srgbClr val="C45E00"/>
                 </a:solidFill>
                 <a:latin typeface="JetBrains Mono"/>
                 <a:ea typeface="JetBrains Mono"/>
                 <a:cs typeface="JetBrains Mono"/>
               </a:rPr>
-              <a:t>import random</a:t>
+              <a:t>import</a:t>
+            </a:r>
+            <a:r>
+              <a:rPr sz="2400">
+                <a:solidFill>
+                  <a:srgbClr val="080808"/>
+                </a:solidFill>
+                <a:latin typeface="JetBrains Mono"/>
+                <a:ea typeface="JetBrains Mono"/>
+                <a:cs typeface="JetBrains Mono"/>
+              </a:rPr>
+              <a:t> random</a:t>
             </a:r>
           </a:p>
           <a:p xmlns:a="http://schemas.openxmlformats.org/drawingml/2006/main">
@@ -5670,13 +5692,24 @@
             <a:r>
               <a:rPr sz="2400">
                 <a:solidFill>
-                  <a:srgbClr val="080808"/>
+                  <a:srgbClr val="C45E00"/>
                 </a:solidFill>
                 <a:latin typeface="JetBrains Mono"/>
                 <a:ea typeface="JetBrains Mono"/>
                 <a:cs typeface="JetBrains Mono"/>
               </a:rPr>
-              <a:t>import random</a:t>
+              <a:t>import</a:t>
+            </a:r>
+            <a:r>
+              <a:rPr sz="2400">
+                <a:solidFill>
+                  <a:srgbClr val="080808"/>
+                </a:solidFill>
+                <a:latin typeface="JetBrains Mono"/>
+                <a:ea typeface="JetBrains Mono"/>
+                <a:cs typeface="JetBrains Mono"/>
+              </a:rPr>
+              <a:t> random</a:t>
             </a:r>
           </a:p>
           <a:p xmlns:a="http://schemas.openxmlformats.org/drawingml/2006/main">
@@ -6295,13 +6328,24 @@
             <a:r>
               <a:rPr sz="1600">
                 <a:solidFill>
-                  <a:srgbClr val="080808"/>
+                  <a:srgbClr val="C45E00"/>
                 </a:solidFill>
                 <a:latin typeface="JetBrains Mono"/>
                 <a:ea typeface="JetBrains Mono"/>
                 <a:cs typeface="JetBrains Mono"/>
               </a:rPr>
-              <a:t>import random</a:t>
+              <a:t>import</a:t>
+            </a:r>
+            <a:r>
+              <a:rPr sz="1600">
+                <a:solidFill>
+                  <a:srgbClr val="080808"/>
+                </a:solidFill>
+                <a:latin typeface="JetBrains Mono"/>
+                <a:ea typeface="JetBrains Mono"/>
+                <a:cs typeface="JetBrains Mono"/>
+              </a:rPr>
+              <a:t> random</a:t>
             </a:r>
             <a:br>
               <a:rPr sz="1600">
@@ -6876,13 +6920,24 @@
             <a:r>
               <a:rPr sz="1600">
                 <a:solidFill>
-                  <a:srgbClr val="080808"/>
+                  <a:srgbClr val="C45E00"/>
                 </a:solidFill>
                 <a:latin typeface="JetBrains Mono"/>
                 <a:ea typeface="JetBrains Mono"/>
                 <a:cs typeface="JetBrains Mono"/>
               </a:rPr>
-              <a:t>import random</a:t>
+              <a:t>import</a:t>
+            </a:r>
+            <a:r>
+              <a:rPr sz="1600">
+                <a:solidFill>
+                  <a:srgbClr val="080808"/>
+                </a:solidFill>
+                <a:latin typeface="JetBrains Mono"/>
+                <a:ea typeface="JetBrains Mono"/>
+                <a:cs typeface="JetBrains Mono"/>
+              </a:rPr>
+              <a:t> random</a:t>
             </a:r>
             <a:br>
               <a:rPr sz="1600">
@@ -7463,13 +7518,24 @@
             <a:r>
               <a:rPr sz="1600">
                 <a:solidFill>
-                  <a:srgbClr val="080808"/>
+                  <a:srgbClr val="C45E00"/>
                 </a:solidFill>
                 <a:latin typeface="JetBrains Mono"/>
                 <a:ea typeface="JetBrains Mono"/>
                 <a:cs typeface="JetBrains Mono"/>
               </a:rPr>
-              <a:t>import random</a:t>
+              <a:t>import</a:t>
+            </a:r>
+            <a:r>
+              <a:rPr sz="1600">
+                <a:solidFill>
+                  <a:srgbClr val="080808"/>
+                </a:solidFill>
+                <a:latin typeface="JetBrains Mono"/>
+                <a:ea typeface="JetBrains Mono"/>
+                <a:cs typeface="JetBrains Mono"/>
+              </a:rPr>
+              <a:t> random</a:t>
             </a:r>
             <a:br>
               <a:rPr sz="1600">
@@ -8050,13 +8116,24 @@
             <a:r>
               <a:rPr sz="1600">
                 <a:solidFill>
-                  <a:srgbClr val="080808"/>
+                  <a:srgbClr val="C45E00"/>
                 </a:solidFill>
                 <a:latin typeface="JetBrains Mono"/>
                 <a:ea typeface="JetBrains Mono"/>
                 <a:cs typeface="JetBrains Mono"/>
               </a:rPr>
-              <a:t>import random</a:t>
+              <a:t>import</a:t>
+            </a:r>
+            <a:r>
+              <a:rPr sz="1600">
+                <a:solidFill>
+                  <a:srgbClr val="080808"/>
+                </a:solidFill>
+                <a:latin typeface="JetBrains Mono"/>
+                <a:ea typeface="JetBrains Mono"/>
+                <a:cs typeface="JetBrains Mono"/>
+              </a:rPr>
+              <a:t> random</a:t>
             </a:r>
             <a:br>
               <a:rPr sz="1600">
@@ -8279,13 +8356,24 @@
             <a:r>
               <a:rPr sz="1800">
                 <a:solidFill>
-                  <a:srgbClr val="080808"/>
+                  <a:srgbClr val="C45E00"/>
                 </a:solidFill>
                 <a:latin typeface="JetBrains Mono"/>
                 <a:ea typeface="JetBrains Mono"/>
                 <a:cs typeface="JetBrains Mono"/>
               </a:rPr>
-              <a:t>import random</a:t>
+              <a:t>import</a:t>
+            </a:r>
+            <a:r>
+              <a:rPr sz="1800">
+                <a:solidFill>
+                  <a:srgbClr val="080808"/>
+                </a:solidFill>
+                <a:latin typeface="JetBrains Mono"/>
+                <a:ea typeface="JetBrains Mono"/>
+                <a:cs typeface="JetBrains Mono"/>
+              </a:rPr>
+              <a:t> random</a:t>
             </a:r>
           </a:p>
           <a:p xmlns:a="http://schemas.openxmlformats.org/drawingml/2006/main">

--- a/Mapped Curriculum Lessons/Grade 7/Lesson 18 - Random Whole Numbers/Random Whole Numbers - Slides.pptx
+++ b/Mapped Curriculum Lessons/Grade 7/Lesson 18 - Random Whole Numbers/Random Whole Numbers - Slides.pptx
@@ -2,28 +2,28 @@
 <file path=ppt/presentation.xml><?xml version="1.0" encoding="utf-8"?>
 <p:presentation xmlns:p="http://schemas.openxmlformats.org/presentationml/2006/main" embedTrueTypeFonts="1" saveSubsetFonts="0">
   <p:sldMasterIdLst>
-    <p:sldMasterId xmlns:r="http://schemas.openxmlformats.org/officeDocument/2006/relationships" id="2147483648" r:id="R7a431d13e0824bf0"/>
+    <p:sldMasterId xmlns:r="http://schemas.openxmlformats.org/officeDocument/2006/relationships" id="2147483648" r:id="R0e7cff8358404955"/>
   </p:sldMasterIdLst>
   <p:notesMasterIdLst>
-    <p:notesMasterId xmlns:r="http://schemas.openxmlformats.org/officeDocument/2006/relationships" r:id="R95e99f5d680b4ffb"/>
+    <p:notesMasterId xmlns:r="http://schemas.openxmlformats.org/officeDocument/2006/relationships" r:id="R757c3d001ab84886"/>
   </p:notesMasterIdLst>
   <p:sldIdLst>
-    <p:sldId xmlns:r="http://schemas.openxmlformats.org/officeDocument/2006/relationships" id="256" r:id="R3599c91b94d84c8a"/>
-    <p:sldId xmlns:r="http://schemas.openxmlformats.org/officeDocument/2006/relationships" id="257" r:id="Rdcd97afa49f84203"/>
-    <p:sldId xmlns:r="http://schemas.openxmlformats.org/officeDocument/2006/relationships" id="258" r:id="Rf9b05e6fe9204104"/>
-    <p:sldId xmlns:r="http://schemas.openxmlformats.org/officeDocument/2006/relationships" id="259" r:id="R0664a91e1cdc4fbf"/>
-    <p:sldId xmlns:r="http://schemas.openxmlformats.org/officeDocument/2006/relationships" id="260" r:id="Rda84e3b87f644e10"/>
-    <p:sldId xmlns:r="http://schemas.openxmlformats.org/officeDocument/2006/relationships" id="261" r:id="R86bdb044cc6849c6"/>
-    <p:sldId xmlns:r="http://schemas.openxmlformats.org/officeDocument/2006/relationships" id="262" r:id="R1bf81f1e1e384ee3"/>
-    <p:sldId xmlns:r="http://schemas.openxmlformats.org/officeDocument/2006/relationships" id="263" r:id="R11132eee19ac47b7"/>
-    <p:sldId xmlns:r="http://schemas.openxmlformats.org/officeDocument/2006/relationships" id="264" r:id="R7023a097158a4e49"/>
+    <p:sldId xmlns:r="http://schemas.openxmlformats.org/officeDocument/2006/relationships" id="256" r:id="R825107ae425f46c4"/>
+    <p:sldId xmlns:r="http://schemas.openxmlformats.org/officeDocument/2006/relationships" id="257" r:id="R1bea385cb1594b7d"/>
+    <p:sldId xmlns:r="http://schemas.openxmlformats.org/officeDocument/2006/relationships" id="258" r:id="Rdbccc654a6714413"/>
+    <p:sldId xmlns:r="http://schemas.openxmlformats.org/officeDocument/2006/relationships" id="259" r:id="R0568c226ed12432e"/>
+    <p:sldId xmlns:r="http://schemas.openxmlformats.org/officeDocument/2006/relationships" id="260" r:id="R978bdca13a8946f4"/>
+    <p:sldId xmlns:r="http://schemas.openxmlformats.org/officeDocument/2006/relationships" id="261" r:id="Rc6accc3865224621"/>
+    <p:sldId xmlns:r="http://schemas.openxmlformats.org/officeDocument/2006/relationships" id="262" r:id="R3ba1bb0311e14201"/>
+    <p:sldId xmlns:r="http://schemas.openxmlformats.org/officeDocument/2006/relationships" id="263" r:id="Rad9053c4f8664d97"/>
+    <p:sldId xmlns:r="http://schemas.openxmlformats.org/officeDocument/2006/relationships" id="264" r:id="R021ae1bd192c498d"/>
   </p:sldIdLst>
   <p:sldSz cx="12192000" cy="6858000"/>
   <p:notesSz cx="6858000" cy="9144000"/>
   <p:embeddedFontLst>
     <p:embeddedFont>
       <p:font typeface="JetBrains Mono"/>
-      <p:regular xmlns:r="http://schemas.openxmlformats.org/officeDocument/2006/relationships" r:id="R6d37374c5ad24520"/>
+      <p:regular xmlns:r="http://schemas.openxmlformats.org/officeDocument/2006/relationships" r:id="R69779099ecbf4644"/>
     </p:embeddedFont>
   </p:embeddedFontLst>
 </p:presentation>
@@ -1071,7 +1071,7 @@
           <p:nvPr/>
         </p:nvPicPr>
         <p:blipFill rotWithShape="1">
-          <a:blip xmlns:r="http://schemas.openxmlformats.org/officeDocument/2006/relationships" xmlns:a="http://schemas.openxmlformats.org/drawingml/2006/main" r:embed="R17e84439e83e4eb3"/>
+          <a:blip xmlns:r="http://schemas.openxmlformats.org/officeDocument/2006/relationships" xmlns:a="http://schemas.openxmlformats.org/drawingml/2006/main" r:embed="Rac1c11ec046547af"/>
           <a:stretch xmlns:a="http://schemas.openxmlformats.org/drawingml/2006/main"/>
         </p:blipFill>
         <p:spPr>
@@ -1451,7 +1451,7 @@
           <p:nvPr/>
         </p:nvPicPr>
         <p:blipFill rotWithShape="1">
-          <a:blip xmlns:r="http://schemas.openxmlformats.org/officeDocument/2006/relationships" xmlns:a="http://schemas.openxmlformats.org/drawingml/2006/main" r:embed="R30ee789cccf44b35">
+          <a:blip xmlns:r="http://schemas.openxmlformats.org/officeDocument/2006/relationships" xmlns:a="http://schemas.openxmlformats.org/drawingml/2006/main" r:embed="Ra00c92f5a635447a">
             <a:alphaModFix amt="28000"/>
           </a:blip>
           <a:stretch xmlns:a="http://schemas.openxmlformats.org/drawingml/2006/main"/>
@@ -1664,7 +1664,7 @@
           <p:nvPr/>
         </p:nvPicPr>
         <p:blipFill rotWithShape="1">
-          <a:blip xmlns:r="http://schemas.openxmlformats.org/officeDocument/2006/relationships" xmlns:a="http://schemas.openxmlformats.org/drawingml/2006/main" r:embed="R881fad5a973e43f0">
+          <a:blip xmlns:r="http://schemas.openxmlformats.org/officeDocument/2006/relationships" xmlns:a="http://schemas.openxmlformats.org/drawingml/2006/main" r:embed="Ra3a6e68a9d3a4a08">
             <a:alphaModFix amt="28000"/>
           </a:blip>
           <a:stretch xmlns:a="http://schemas.openxmlformats.org/drawingml/2006/main"/>
@@ -1899,7 +1899,7 @@
           <p:nvPr/>
         </p:nvPicPr>
         <p:blipFill rotWithShape="1">
-          <a:blip xmlns:r="http://schemas.openxmlformats.org/officeDocument/2006/relationships" xmlns:a="http://schemas.openxmlformats.org/drawingml/2006/main" r:embed="Re4812914b8a84682">
+          <a:blip xmlns:r="http://schemas.openxmlformats.org/officeDocument/2006/relationships" xmlns:a="http://schemas.openxmlformats.org/drawingml/2006/main" r:embed="Rade9613132d04113">
             <a:alphaModFix amt="28000"/>
           </a:blip>
           <a:stretch xmlns:a="http://schemas.openxmlformats.org/drawingml/2006/main"/>
@@ -2176,7 +2176,7 @@
           <p:nvPr/>
         </p:nvPicPr>
         <p:blipFill rotWithShape="1">
-          <a:blip xmlns:r="http://schemas.openxmlformats.org/officeDocument/2006/relationships" xmlns:a="http://schemas.openxmlformats.org/drawingml/2006/main" r:embed="R3b25b2896ddc433a">
+          <a:blip xmlns:r="http://schemas.openxmlformats.org/officeDocument/2006/relationships" xmlns:a="http://schemas.openxmlformats.org/drawingml/2006/main" r:embed="Rd5995e15b01e4591">
             <a:alphaModFix amt="28000"/>
           </a:blip>
           <a:stretch xmlns:a="http://schemas.openxmlformats.org/drawingml/2006/main"/>
@@ -2451,7 +2451,7 @@
           <p:nvPr/>
         </p:nvPicPr>
         <p:blipFill rotWithShape="1">
-          <a:blip xmlns:r="http://schemas.openxmlformats.org/officeDocument/2006/relationships" xmlns:a="http://schemas.openxmlformats.org/drawingml/2006/main" r:embed="R33aa6fe97a26486a">
+          <a:blip xmlns:r="http://schemas.openxmlformats.org/officeDocument/2006/relationships" xmlns:a="http://schemas.openxmlformats.org/drawingml/2006/main" r:embed="Rc1bfa41db6d44676">
             <a:alphaModFix amt="28000"/>
           </a:blip>
           <a:stretch xmlns:a="http://schemas.openxmlformats.org/drawingml/2006/main"/>
@@ -2875,7 +2875,7 @@
           <p:nvPr/>
         </p:nvPicPr>
         <p:blipFill rotWithShape="1">
-          <a:blip xmlns:r="http://schemas.openxmlformats.org/officeDocument/2006/relationships" xmlns:a="http://schemas.openxmlformats.org/drawingml/2006/main" r:embed="R43c4fc77ea2146cf">
+          <a:blip xmlns:r="http://schemas.openxmlformats.org/officeDocument/2006/relationships" xmlns:a="http://schemas.openxmlformats.org/drawingml/2006/main" r:embed="Rabf0f5bd1a544f43">
             <a:alphaModFix amt="28000"/>
           </a:blip>
           <a:stretch xmlns:a="http://schemas.openxmlformats.org/drawingml/2006/main"/>
@@ -3016,7 +3016,7 @@
           <p:nvPr/>
         </p:nvPicPr>
         <p:blipFill rotWithShape="1">
-          <a:blip xmlns:r="http://schemas.openxmlformats.org/officeDocument/2006/relationships" xmlns:a="http://schemas.openxmlformats.org/drawingml/2006/main" r:embed="R03ccf5572b544108">
+          <a:blip xmlns:r="http://schemas.openxmlformats.org/officeDocument/2006/relationships" xmlns:a="http://schemas.openxmlformats.org/drawingml/2006/main" r:embed="R4def8a724f7e455b">
             <a:alphaModFix amt="28000"/>
           </a:blip>
           <a:stretch xmlns:a="http://schemas.openxmlformats.org/drawingml/2006/main"/>
@@ -3130,7 +3130,7 @@
           <p:nvPr/>
         </p:nvPicPr>
         <p:blipFill rotWithShape="1">
-          <a:blip xmlns:r="http://schemas.openxmlformats.org/officeDocument/2006/relationships" xmlns:a="http://schemas.openxmlformats.org/drawingml/2006/main" r:embed="Rd9ec8425ba9a4e5b">
+          <a:blip xmlns:r="http://schemas.openxmlformats.org/officeDocument/2006/relationships" xmlns:a="http://schemas.openxmlformats.org/drawingml/2006/main" r:embed="R2f605bb318eb4e43">
             <a:alphaModFix amt="28000"/>
           </a:blip>
           <a:stretch xmlns:a="http://schemas.openxmlformats.org/drawingml/2006/main"/>
@@ -3457,7 +3457,7 @@
           <p:nvPr/>
         </p:nvPicPr>
         <p:blipFill rotWithShape="1">
-          <a:blip xmlns:r="http://schemas.openxmlformats.org/officeDocument/2006/relationships" xmlns:a="http://schemas.openxmlformats.org/drawingml/2006/main" r:embed="R0d3216652abc45e8">
+          <a:blip xmlns:r="http://schemas.openxmlformats.org/officeDocument/2006/relationships" xmlns:a="http://schemas.openxmlformats.org/drawingml/2006/main" r:embed="R50daa5d8c4894acb">
             <a:alphaModFix amt="28000"/>
           </a:blip>
           <a:stretch xmlns:a="http://schemas.openxmlformats.org/drawingml/2006/main"/>
@@ -3745,7 +3745,7 @@
           <p:nvPr/>
         </p:nvPicPr>
         <p:blipFill rotWithShape="1">
-          <a:blip xmlns:r="http://schemas.openxmlformats.org/officeDocument/2006/relationships" xmlns:a="http://schemas.openxmlformats.org/drawingml/2006/main" r:embed="Ra92d2b3170f84a6c">
+          <a:blip xmlns:r="http://schemas.openxmlformats.org/officeDocument/2006/relationships" xmlns:a="http://schemas.openxmlformats.org/drawingml/2006/main" r:embed="R287f43ae9ef3482e">
             <a:alphaModFix amt="28000"/>
           </a:blip>
           <a:stretch xmlns:a="http://schemas.openxmlformats.org/drawingml/2006/main"/>
@@ -3982,17 +3982,17 @@
   </p:cSld>
   <p:clrMap bg1="lt1" tx1="dk1" bg2="lt2" tx2="dk2" accent1="accent1" accent2="accent2" accent3="accent3" accent4="accent4" accent5="accent5" accent6="accent6" hlink="hlink" folHlink="folHlink"/>
   <p:sldLayoutIdLst>
-    <p:sldLayoutId xmlns:r="http://schemas.openxmlformats.org/officeDocument/2006/relationships" id="2147483649" r:id="Re0c7ceac8880498f"/>
-    <p:sldLayoutId xmlns:r="http://schemas.openxmlformats.org/officeDocument/2006/relationships" id="2147483650" r:id="R4f68d274a4304672"/>
-    <p:sldLayoutId xmlns:r="http://schemas.openxmlformats.org/officeDocument/2006/relationships" id="2147483651" r:id="R95c50df6738c443f"/>
-    <p:sldLayoutId xmlns:r="http://schemas.openxmlformats.org/officeDocument/2006/relationships" id="2147483652" r:id="Rdfd263a2047545b5"/>
-    <p:sldLayoutId xmlns:r="http://schemas.openxmlformats.org/officeDocument/2006/relationships" id="2147483653" r:id="R00bb3bc68d3d4001"/>
-    <p:sldLayoutId xmlns:r="http://schemas.openxmlformats.org/officeDocument/2006/relationships" id="2147483654" r:id="R96b79f5b51e6466d"/>
-    <p:sldLayoutId xmlns:r="http://schemas.openxmlformats.org/officeDocument/2006/relationships" id="2147483655" r:id="R1d4bfdaacb5d43b1"/>
-    <p:sldLayoutId xmlns:r="http://schemas.openxmlformats.org/officeDocument/2006/relationships" id="2147483656" r:id="R85bac41c381642cd"/>
-    <p:sldLayoutId xmlns:r="http://schemas.openxmlformats.org/officeDocument/2006/relationships" id="2147483657" r:id="Rf7176cf20e5b4f99"/>
-    <p:sldLayoutId xmlns:r="http://schemas.openxmlformats.org/officeDocument/2006/relationships" id="2147483658" r:id="Rc7c274e6a7da4365"/>
-    <p:sldLayoutId xmlns:r="http://schemas.openxmlformats.org/officeDocument/2006/relationships" id="2147483659" r:id="R7d352789593a4852"/>
+    <p:sldLayoutId xmlns:r="http://schemas.openxmlformats.org/officeDocument/2006/relationships" id="2147483649" r:id="R24feb5e070e64a55"/>
+    <p:sldLayoutId xmlns:r="http://schemas.openxmlformats.org/officeDocument/2006/relationships" id="2147483650" r:id="R1321b605746f4816"/>
+    <p:sldLayoutId xmlns:r="http://schemas.openxmlformats.org/officeDocument/2006/relationships" id="2147483651" r:id="R88c2cf697564420d"/>
+    <p:sldLayoutId xmlns:r="http://schemas.openxmlformats.org/officeDocument/2006/relationships" id="2147483652" r:id="Rf97b763e34c54b38"/>
+    <p:sldLayoutId xmlns:r="http://schemas.openxmlformats.org/officeDocument/2006/relationships" id="2147483653" r:id="R208a065f3be84445"/>
+    <p:sldLayoutId xmlns:r="http://schemas.openxmlformats.org/officeDocument/2006/relationships" id="2147483654" r:id="Ra472966f4429473a"/>
+    <p:sldLayoutId xmlns:r="http://schemas.openxmlformats.org/officeDocument/2006/relationships" id="2147483655" r:id="Rb1aa7d031b334f50"/>
+    <p:sldLayoutId xmlns:r="http://schemas.openxmlformats.org/officeDocument/2006/relationships" id="2147483656" r:id="R4d098c9869534f23"/>
+    <p:sldLayoutId xmlns:r="http://schemas.openxmlformats.org/officeDocument/2006/relationships" id="2147483657" r:id="R79b0d73e9ca54b58"/>
+    <p:sldLayoutId xmlns:r="http://schemas.openxmlformats.org/officeDocument/2006/relationships" id="2147483658" r:id="R59a00c2f02f74e09"/>
+    <p:sldLayoutId xmlns:r="http://schemas.openxmlformats.org/officeDocument/2006/relationships" id="2147483659" r:id="R4f50559d079f43df"/>
   </p:sldLayoutIdLst>
   <p:hf hdr="0" ftr="0" dt="0"/>
   <p:txStyles>
